--- a/CASALS.pptx
+++ b/CASALS.pptx
@@ -5,25 +5,26 @@
     <p:sldMasterId id="2147483648" r:id="rId1"/>
   </p:sldMasterIdLst>
   <p:notesMasterIdLst>
-    <p:notesMasterId r:id="rId18"/>
+    <p:notesMasterId r:id="rId19"/>
   </p:notesMasterIdLst>
   <p:sldIdLst>
     <p:sldId id="256" r:id="rId2"/>
     <p:sldId id="571" r:id="rId3"/>
     <p:sldId id="572" r:id="rId4"/>
     <p:sldId id="575" r:id="rId5"/>
-    <p:sldId id="573" r:id="rId6"/>
-    <p:sldId id="574" r:id="rId7"/>
-    <p:sldId id="576" r:id="rId8"/>
-    <p:sldId id="577" r:id="rId9"/>
-    <p:sldId id="578" r:id="rId10"/>
-    <p:sldId id="579" r:id="rId11"/>
-    <p:sldId id="580" r:id="rId12"/>
-    <p:sldId id="581" r:id="rId13"/>
-    <p:sldId id="582" r:id="rId14"/>
-    <p:sldId id="583" r:id="rId15"/>
-    <p:sldId id="584" r:id="rId16"/>
-    <p:sldId id="585" r:id="rId17"/>
+    <p:sldId id="577" r:id="rId6"/>
+    <p:sldId id="573" r:id="rId7"/>
+    <p:sldId id="574" r:id="rId8"/>
+    <p:sldId id="578" r:id="rId9"/>
+    <p:sldId id="586" r:id="rId10"/>
+    <p:sldId id="576" r:id="rId11"/>
+    <p:sldId id="579" r:id="rId12"/>
+    <p:sldId id="580" r:id="rId13"/>
+    <p:sldId id="581" r:id="rId14"/>
+    <p:sldId id="582" r:id="rId15"/>
+    <p:sldId id="583" r:id="rId16"/>
+    <p:sldId id="584" r:id="rId17"/>
+    <p:sldId id="585" r:id="rId18"/>
   </p:sldIdLst>
   <p:sldSz cx="12192000" cy="6858000"/>
   <p:notesSz cx="9144000" cy="6858000"/>
@@ -131,11 +132,12 @@
             <p14:sldId id="571"/>
             <p14:sldId id="572"/>
             <p14:sldId id="575"/>
+            <p14:sldId id="577"/>
             <p14:sldId id="573"/>
             <p14:sldId id="574"/>
+            <p14:sldId id="578"/>
+            <p14:sldId id="586"/>
             <p14:sldId id="576"/>
-            <p14:sldId id="577"/>
-            <p14:sldId id="578"/>
             <p14:sldId id="579"/>
             <p14:sldId id="580"/>
             <p14:sldId id="581"/>
@@ -178,7 +180,7 @@
   <pc:docChgLst>
     <pc:chgData name="Jiageng Zhong" userId="b52c9415-1ab4-4841-99d2-946641921277" providerId="ADAL" clId="{8EC3C21B-848A-4780-93CD-51C3A3128A88}"/>
     <pc:docChg chg="undo custSel addSld delSld modSld sldOrd modSection">
-      <pc:chgData name="Jiageng Zhong" userId="b52c9415-1ab4-4841-99d2-946641921277" providerId="ADAL" clId="{8EC3C21B-848A-4780-93CD-51C3A3128A88}" dt="2026-02-08T15:59:47.806" v="502" actId="2711"/>
+      <pc:chgData name="Jiageng Zhong" userId="b52c9415-1ab4-4841-99d2-946641921277" providerId="ADAL" clId="{8EC3C21B-848A-4780-93CD-51C3A3128A88}" dt="2026-02-09T01:35:25.917" v="583" actId="1440"/>
       <pc:docMkLst>
         <pc:docMk/>
       </pc:docMkLst>
@@ -420,7 +422,7 @@
         </pc:spChg>
       </pc:sldChg>
       <pc:sldChg chg="addSp delSp modSp add mod">
-        <pc:chgData name="Jiageng Zhong" userId="b52c9415-1ab4-4841-99d2-946641921277" providerId="ADAL" clId="{8EC3C21B-848A-4780-93CD-51C3A3128A88}" dt="2026-02-08T15:38:12.109" v="451" actId="1035"/>
+        <pc:chgData name="Jiageng Zhong" userId="b52c9415-1ab4-4841-99d2-946641921277" providerId="ADAL" clId="{8EC3C21B-848A-4780-93CD-51C3A3128A88}" dt="2026-02-09T01:35:25.917" v="583" actId="1440"/>
         <pc:sldMkLst>
           <pc:docMk/>
           <pc:sldMk cId="2168070692" sldId="576"/>
@@ -466,7 +468,7 @@
           </ac:spMkLst>
         </pc:spChg>
         <pc:spChg chg="add mod">
-          <ac:chgData name="Jiageng Zhong" userId="b52c9415-1ab4-4841-99d2-946641921277" providerId="ADAL" clId="{8EC3C21B-848A-4780-93CD-51C3A3128A88}" dt="2026-02-08T15:37:50.913" v="434" actId="1076"/>
+          <ac:chgData name="Jiageng Zhong" userId="b52c9415-1ab4-4841-99d2-946641921277" providerId="ADAL" clId="{8EC3C21B-848A-4780-93CD-51C3A3128A88}" dt="2026-02-09T01:35:17.560" v="582" actId="1038"/>
           <ac:spMkLst>
             <pc:docMk/>
             <pc:sldMk cId="2168070692" sldId="576"/>
@@ -474,7 +476,7 @@
           </ac:spMkLst>
         </pc:spChg>
         <pc:spChg chg="add mod">
-          <ac:chgData name="Jiageng Zhong" userId="b52c9415-1ab4-4841-99d2-946641921277" providerId="ADAL" clId="{8EC3C21B-848A-4780-93CD-51C3A3128A88}" dt="2026-02-08T15:38:12.109" v="451" actId="1035"/>
+          <ac:chgData name="Jiageng Zhong" userId="b52c9415-1ab4-4841-99d2-946641921277" providerId="ADAL" clId="{8EC3C21B-848A-4780-93CD-51C3A3128A88}" dt="2026-02-09T01:35:06.293" v="559" actId="1035"/>
           <ac:spMkLst>
             <pc:docMk/>
             <pc:sldMk cId="2168070692" sldId="576"/>
@@ -498,7 +500,7 @@
           </ac:picMkLst>
         </pc:picChg>
         <pc:picChg chg="add mod">
-          <ac:chgData name="Jiageng Zhong" userId="b52c9415-1ab4-4841-99d2-946641921277" providerId="ADAL" clId="{8EC3C21B-848A-4780-93CD-51C3A3128A88}" dt="2026-02-08T15:37:17.289" v="408" actId="1076"/>
+          <ac:chgData name="Jiageng Zhong" userId="b52c9415-1ab4-4841-99d2-946641921277" providerId="ADAL" clId="{8EC3C21B-848A-4780-93CD-51C3A3128A88}" dt="2026-02-09T01:35:25.917" v="583" actId="1440"/>
           <ac:picMkLst>
             <pc:docMk/>
             <pc:sldMk cId="2168070692" sldId="576"/>
@@ -506,8 +508,8 @@
           </ac:picMkLst>
         </pc:picChg>
       </pc:sldChg>
-      <pc:sldChg chg="addSp modSp add mod">
-        <pc:chgData name="Jiageng Zhong" userId="b52c9415-1ab4-4841-99d2-946641921277" providerId="ADAL" clId="{8EC3C21B-848A-4780-93CD-51C3A3128A88}" dt="2026-02-08T15:40:34.230" v="496" actId="113"/>
+      <pc:sldChg chg="addSp modSp add mod ord">
+        <pc:chgData name="Jiageng Zhong" userId="b52c9415-1ab4-4841-99d2-946641921277" providerId="ADAL" clId="{8EC3C21B-848A-4780-93CD-51C3A3128A88}" dt="2026-02-09T01:13:40.031" v="504"/>
         <pc:sldMkLst>
           <pc:docMk/>
           <pc:sldMk cId="3479097923" sldId="577"/>
@@ -529,12 +531,28 @@
           </ac:spMkLst>
         </pc:spChg>
       </pc:sldChg>
-      <pc:sldChg chg="add">
-        <pc:chgData name="Jiageng Zhong" userId="b52c9415-1ab4-4841-99d2-946641921277" providerId="ADAL" clId="{8EC3C21B-848A-4780-93CD-51C3A3128A88}" dt="2026-02-08T15:20:56.819" v="325" actId="2890"/>
+      <pc:sldChg chg="addSp modSp add mod ord">
+        <pc:chgData name="Jiageng Zhong" userId="b52c9415-1ab4-4841-99d2-946641921277" providerId="ADAL" clId="{8EC3C21B-848A-4780-93CD-51C3A3128A88}" dt="2026-02-09T01:16:02.941" v="531" actId="1076"/>
         <pc:sldMkLst>
           <pc:docMk/>
           <pc:sldMk cId="3981881105" sldId="578"/>
         </pc:sldMkLst>
+        <pc:spChg chg="mod">
+          <ac:chgData name="Jiageng Zhong" userId="b52c9415-1ab4-4841-99d2-946641921277" providerId="ADAL" clId="{8EC3C21B-848A-4780-93CD-51C3A3128A88}" dt="2026-02-09T01:14:39.677" v="515" actId="20577"/>
+          <ac:spMkLst>
+            <pc:docMk/>
+            <pc:sldMk cId="3981881105" sldId="578"/>
+            <ac:spMk id="2" creationId="{B51B1C80-E8A1-FD0A-5331-661516AC0F9D}"/>
+          </ac:spMkLst>
+        </pc:spChg>
+        <pc:spChg chg="add mod">
+          <ac:chgData name="Jiageng Zhong" userId="b52c9415-1ab4-4841-99d2-946641921277" providerId="ADAL" clId="{8EC3C21B-848A-4780-93CD-51C3A3128A88}" dt="2026-02-09T01:16:02.941" v="531" actId="1076"/>
+          <ac:spMkLst>
+            <pc:docMk/>
+            <pc:sldMk cId="3981881105" sldId="578"/>
+            <ac:spMk id="4" creationId="{E49C68B1-C0E8-1FCA-B6DD-8223374AB53A}"/>
+          </ac:spMkLst>
+        </pc:spChg>
       </pc:sldChg>
       <pc:sldChg chg="add">
         <pc:chgData name="Jiageng Zhong" userId="b52c9415-1ab4-4841-99d2-946641921277" providerId="ADAL" clId="{8EC3C21B-848A-4780-93CD-51C3A3128A88}" dt="2026-02-08T15:20:57.080" v="326" actId="2890"/>
@@ -584,6 +602,29 @@
           <pc:docMk/>
           <pc:sldMk cId="430923665" sldId="585"/>
         </pc:sldMkLst>
+      </pc:sldChg>
+      <pc:sldChg chg="addSp delSp modSp add mod">
+        <pc:chgData name="Jiageng Zhong" userId="b52c9415-1ab4-4841-99d2-946641921277" providerId="ADAL" clId="{8EC3C21B-848A-4780-93CD-51C3A3128A88}" dt="2026-02-09T01:20:45.019" v="539" actId="1076"/>
+        <pc:sldMkLst>
+          <pc:docMk/>
+          <pc:sldMk cId="3653343407" sldId="586"/>
+        </pc:sldMkLst>
+        <pc:spChg chg="del">
+          <ac:chgData name="Jiageng Zhong" userId="b52c9415-1ab4-4841-99d2-946641921277" providerId="ADAL" clId="{8EC3C21B-848A-4780-93CD-51C3A3128A88}" dt="2026-02-09T01:20:25.630" v="533" actId="478"/>
+          <ac:spMkLst>
+            <pc:docMk/>
+            <pc:sldMk cId="3653343407" sldId="586"/>
+            <ac:spMk id="4" creationId="{F6B95780-117C-5124-E6A8-B5A505D8AB9A}"/>
+          </ac:spMkLst>
+        </pc:spChg>
+        <pc:picChg chg="add mod">
+          <ac:chgData name="Jiageng Zhong" userId="b52c9415-1ab4-4841-99d2-946641921277" providerId="ADAL" clId="{8EC3C21B-848A-4780-93CD-51C3A3128A88}" dt="2026-02-09T01:20:45.019" v="539" actId="1076"/>
+          <ac:picMkLst>
+            <pc:docMk/>
+            <pc:sldMk cId="3653343407" sldId="586"/>
+            <ac:picMk id="5" creationId="{57B2DAE5-1984-7E7B-4C37-5A30B1A2ED92}"/>
+          </ac:picMkLst>
+        </pc:picChg>
       </pc:sldChg>
     </pc:docChg>
   </pc:docChgLst>
@@ -2693,6 +2734,392 @@
         <p:cNvPr id="1" name="">
           <a:extLst>
             <a:ext uri="{FF2B5EF4-FFF2-40B4-BE49-F238E27FC236}">
+              <a16:creationId xmlns:a16="http://schemas.microsoft.com/office/drawing/2014/main" id="{75CDF07B-AD59-CA1F-E5A1-3ABFA4FA3F80}"/>
+            </a:ext>
+          </a:extLst>
+        </p:cNvPr>
+        <p:cNvGrpSpPr/>
+        <p:nvPr/>
+      </p:nvGrpSpPr>
+      <p:grpSpPr>
+        <a:xfrm>
+          <a:off x="0" y="0"/>
+          <a:ext cx="0" cy="0"/>
+          <a:chOff x="0" y="0"/>
+          <a:chExt cx="0" cy="0"/>
+        </a:xfrm>
+      </p:grpSpPr>
+      <p:sp>
+        <p:nvSpPr>
+          <p:cNvPr id="2" name="TextBox 1">
+            <a:extLst>
+              <a:ext uri="{FF2B5EF4-FFF2-40B4-BE49-F238E27FC236}">
+                <a16:creationId xmlns:a16="http://schemas.microsoft.com/office/drawing/2014/main" id="{FACB41BD-5286-CD50-0832-79504F037767}"/>
+              </a:ext>
+            </a:extLst>
+          </p:cNvPr>
+          <p:cNvSpPr txBox="1"/>
+          <p:nvPr/>
+        </p:nvSpPr>
+        <p:spPr>
+          <a:xfrm>
+            <a:off x="227066" y="141706"/>
+            <a:ext cx="4870244" cy="461665"/>
+          </a:xfrm>
+          <a:prstGeom prst="rect">
+            <a:avLst/>
+          </a:prstGeom>
+          <a:noFill/>
+        </p:spPr>
+        <p:txBody>
+          <a:bodyPr wrap="none" rtlCol="0">
+            <a:spAutoFit/>
+          </a:bodyPr>
+          <a:lstStyle/>
+          <a:p>
+            <a:pPr marL="342900" indent="-342900">
+              <a:buFont typeface="Wingdings" panose="05000000000000000000" pitchFamily="2" charset="2"/>
+              <a:buChar char="Ø"/>
+            </a:pPr>
+            <a:r>
+              <a:rPr lang="en-US" altLang="zh-CN" sz="2400" b="1" dirty="0">
+                <a:latin typeface="Arial" panose="020B0604020202020204" pitchFamily="34" charset="0"/>
+                <a:cs typeface="Arial" panose="020B0604020202020204" pitchFamily="34" charset="0"/>
+              </a:rPr>
+              <a:t>Nadir-port window reflections</a:t>
+            </a:r>
+            <a:endParaRPr lang="en-US" sz="2400" b="1" dirty="0">
+              <a:latin typeface="Arial" panose="020B0604020202020204" pitchFamily="34" charset="0"/>
+              <a:cs typeface="Arial" panose="020B0604020202020204" pitchFamily="34" charset="0"/>
+            </a:endParaRPr>
+          </a:p>
+        </p:txBody>
+      </p:sp>
+      <p:sp>
+        <p:nvSpPr>
+          <p:cNvPr id="5" name="TextBox 4">
+            <a:extLst>
+              <a:ext uri="{FF2B5EF4-FFF2-40B4-BE49-F238E27FC236}">
+                <a16:creationId xmlns:a16="http://schemas.microsoft.com/office/drawing/2014/main" id="{6F62CDE9-92FF-0A30-C396-84DC910D29E3}"/>
+              </a:ext>
+            </a:extLst>
+          </p:cNvPr>
+          <p:cNvSpPr txBox="1"/>
+          <p:nvPr/>
+        </p:nvSpPr>
+        <p:spPr>
+          <a:xfrm>
+            <a:off x="558530" y="971775"/>
+            <a:ext cx="7216588" cy="4611519"/>
+          </a:xfrm>
+          <a:prstGeom prst="rect">
+            <a:avLst/>
+          </a:prstGeom>
+          <a:noFill/>
+        </p:spPr>
+        <p:txBody>
+          <a:bodyPr wrap="square">
+            <a:spAutoFit/>
+          </a:bodyPr>
+          <a:lstStyle/>
+          <a:p>
+            <a:pPr algn="just">
+              <a:lnSpc>
+                <a:spcPct val="150000"/>
+              </a:lnSpc>
+            </a:pPr>
+            <a:r>
+              <a:rPr lang="en-US" dirty="0">
+                <a:latin typeface="Arial" panose="020B0604020202020204" pitchFamily="34" charset="0"/>
+                <a:cs typeface="Arial" panose="020B0604020202020204" pitchFamily="34" charset="0"/>
+              </a:rPr>
+              <a:t>A “nadir-port window” is a protective optical window in the nadir viewing path. A small fraction of the laser pulse can reflect off that window surface(s) and re-enter the receiver path, creating a strong instrumental ghost (non-geophysical) at a consistent range/time.</a:t>
+            </a:r>
+          </a:p>
+          <a:p>
+            <a:pPr algn="just">
+              <a:lnSpc>
+                <a:spcPct val="150000"/>
+              </a:lnSpc>
+            </a:pPr>
+            <a:endParaRPr lang="en-US" dirty="0">
+              <a:latin typeface="Arial" panose="020B0604020202020204" pitchFamily="34" charset="0"/>
+              <a:cs typeface="Arial" panose="020B0604020202020204" pitchFamily="34" charset="0"/>
+            </a:endParaRPr>
+          </a:p>
+          <a:p>
+            <a:pPr>
+              <a:lnSpc>
+                <a:spcPct val="150000"/>
+              </a:lnSpc>
+              <a:buNone/>
+            </a:pPr>
+            <a:r>
+              <a:rPr lang="en-US" altLang="zh-CN" dirty="0">
+                <a:latin typeface="Arial" panose="020B0604020202020204" pitchFamily="34" charset="0"/>
+                <a:cs typeface="Arial" panose="020B0604020202020204" pitchFamily="34" charset="0"/>
+              </a:rPr>
+              <a:t>Possible ways to </a:t>
+            </a:r>
+            <a:r>
+              <a:rPr lang="en-US" dirty="0">
+                <a:latin typeface="Arial" panose="020B0604020202020204" pitchFamily="34" charset="0"/>
+                <a:cs typeface="Arial" panose="020B0604020202020204" pitchFamily="34" charset="0"/>
+              </a:rPr>
+              <a:t>detect:</a:t>
+            </a:r>
+          </a:p>
+          <a:p>
+            <a:pPr marL="400050" indent="-400050">
+              <a:lnSpc>
+                <a:spcPct val="150000"/>
+              </a:lnSpc>
+              <a:buAutoNum type="romanLcParenBoth"/>
+            </a:pPr>
+            <a:r>
+              <a:rPr lang="en-US" dirty="0">
+                <a:latin typeface="Arial" panose="020B0604020202020204" pitchFamily="34" charset="0"/>
+                <a:cs typeface="Arial" panose="020B0604020202020204" pitchFamily="34" charset="0"/>
+              </a:rPr>
+              <a:t>fixed range bin / early-time consistency</a:t>
+            </a:r>
+          </a:p>
+          <a:p>
+            <a:pPr marL="400050" indent="-400050">
+              <a:lnSpc>
+                <a:spcPct val="150000"/>
+              </a:lnSpc>
+              <a:buAutoNum type="romanLcParenBoth"/>
+            </a:pPr>
+            <a:r>
+              <a:rPr lang="en-US" dirty="0">
+                <a:latin typeface="Arial" panose="020B0604020202020204" pitchFamily="34" charset="0"/>
+                <a:cs typeface="Arial" panose="020B0604020202020204" pitchFamily="34" charset="0"/>
+              </a:rPr>
+              <a:t>abnormal amplitude</a:t>
+            </a:r>
+          </a:p>
+          <a:p>
+            <a:pPr marL="400050" indent="-400050">
+              <a:lnSpc>
+                <a:spcPct val="150000"/>
+              </a:lnSpc>
+              <a:buAutoNum type="romanLcParenBoth"/>
+            </a:pPr>
+            <a:r>
+              <a:rPr lang="en-US" dirty="0">
+                <a:latin typeface="Arial" panose="020B0604020202020204" pitchFamily="34" charset="0"/>
+                <a:cs typeface="Arial" panose="020B0604020202020204" pitchFamily="34" charset="0"/>
+              </a:rPr>
+              <a:t>weak dependence on scene</a:t>
+            </a:r>
+          </a:p>
+          <a:p>
+            <a:pPr marL="400050" indent="-400050">
+              <a:lnSpc>
+                <a:spcPct val="150000"/>
+              </a:lnSpc>
+              <a:buAutoNum type="romanLcParenBoth"/>
+            </a:pPr>
+            <a:r>
+              <a:rPr lang="en-US" dirty="0">
+                <a:latin typeface="Arial" panose="020B0604020202020204" pitchFamily="34" charset="0"/>
+                <a:cs typeface="Arial" panose="020B0604020202020204" pitchFamily="34" charset="0"/>
+              </a:rPr>
+              <a:t>track-localized behavior</a:t>
+            </a:r>
+          </a:p>
+          <a:p>
+            <a:pPr algn="just">
+              <a:lnSpc>
+                <a:spcPct val="150000"/>
+              </a:lnSpc>
+            </a:pPr>
+            <a:endParaRPr lang="en-US" dirty="0">
+              <a:latin typeface="Arial" panose="020B0604020202020204" pitchFamily="34" charset="0"/>
+              <a:cs typeface="Arial" panose="020B0604020202020204" pitchFamily="34" charset="0"/>
+            </a:endParaRPr>
+          </a:p>
+        </p:txBody>
+      </p:sp>
+      <p:pic>
+        <p:nvPicPr>
+          <p:cNvPr id="9" name="Picture 8">
+            <a:extLst>
+              <a:ext uri="{FF2B5EF4-FFF2-40B4-BE49-F238E27FC236}">
+                <a16:creationId xmlns:a16="http://schemas.microsoft.com/office/drawing/2014/main" id="{E0EB5965-0B32-3C5A-4DD0-EEEC10686235}"/>
+              </a:ext>
+            </a:extLst>
+          </p:cNvPr>
+          <p:cNvPicPr>
+            <a:picLocks noChangeAspect="1"/>
+          </p:cNvPicPr>
+          <p:nvPr/>
+        </p:nvPicPr>
+        <p:blipFill>
+          <a:blip r:embed="rId2"/>
+          <a:stretch>
+            <a:fillRect/>
+          </a:stretch>
+        </p:blipFill>
+        <p:spPr>
+          <a:xfrm>
+            <a:off x="8465389" y="368678"/>
+            <a:ext cx="3168081" cy="2855339"/>
+          </a:xfrm>
+          <a:prstGeom prst="rect">
+            <a:avLst/>
+          </a:prstGeom>
+        </p:spPr>
+      </p:pic>
+      <p:pic>
+        <p:nvPicPr>
+          <p:cNvPr id="11" name="Picture 10">
+            <a:extLst>
+              <a:ext uri="{FF2B5EF4-FFF2-40B4-BE49-F238E27FC236}">
+                <a16:creationId xmlns:a16="http://schemas.microsoft.com/office/drawing/2014/main" id="{9DC0813D-C5CF-08ED-C8CD-CCE891C068F6}"/>
+              </a:ext>
+            </a:extLst>
+          </p:cNvPr>
+          <p:cNvPicPr>
+            <a:picLocks noChangeAspect="1"/>
+          </p:cNvPicPr>
+          <p:nvPr/>
+        </p:nvPicPr>
+        <p:blipFill>
+          <a:blip r:embed="rId3"/>
+          <a:stretch>
+            <a:fillRect/>
+          </a:stretch>
+        </p:blipFill>
+        <p:spPr>
+          <a:xfrm rot="10800000">
+            <a:off x="8465388" y="3429000"/>
+            <a:ext cx="3168081" cy="2908856"/>
+          </a:xfrm>
+          <a:prstGeom prst="rect">
+            <a:avLst/>
+          </a:prstGeom>
+          <a:ln>
+            <a:noFill/>
+          </a:ln>
+          <a:effectLst>
+            <a:outerShdw blurRad="190500" algn="tl" rotWithShape="0">
+              <a:srgbClr val="000000">
+                <a:alpha val="70000"/>
+              </a:srgbClr>
+            </a:outerShdw>
+          </a:effectLst>
+        </p:spPr>
+      </p:pic>
+      <p:sp>
+        <p:nvSpPr>
+          <p:cNvPr id="14" name="TextBox 13">
+            <a:extLst>
+              <a:ext uri="{FF2B5EF4-FFF2-40B4-BE49-F238E27FC236}">
+                <a16:creationId xmlns:a16="http://schemas.microsoft.com/office/drawing/2014/main" id="{A68297C5-B857-3E03-63E9-E9380303CF4F}"/>
+              </a:ext>
+            </a:extLst>
+          </p:cNvPr>
+          <p:cNvSpPr txBox="1"/>
+          <p:nvPr/>
+        </p:nvSpPr>
+        <p:spPr>
+          <a:xfrm rot="16200000">
+            <a:off x="7515082" y="4698762"/>
+            <a:ext cx="1569660" cy="369332"/>
+          </a:xfrm>
+          <a:prstGeom prst="rect">
+            <a:avLst/>
+          </a:prstGeom>
+          <a:noFill/>
+        </p:spPr>
+        <p:txBody>
+          <a:bodyPr wrap="none" rtlCol="0">
+            <a:spAutoFit/>
+          </a:bodyPr>
+          <a:lstStyle/>
+          <a:p>
+            <a:r>
+              <a:rPr lang="en-US" dirty="0">
+                <a:latin typeface="Arial" panose="020B0604020202020204" pitchFamily="34" charset="0"/>
+                <a:cs typeface="Arial" panose="020B0604020202020204" pitchFamily="34" charset="0"/>
+              </a:rPr>
+              <a:t>Range (m)</a:t>
+            </a:r>
+            <a:r>
+              <a:rPr lang="zh-CN" altLang="en-US" dirty="0">
+                <a:latin typeface="Arial" panose="020B0604020202020204" pitchFamily="34" charset="0"/>
+                <a:cs typeface="Arial" panose="020B0604020202020204" pitchFamily="34" charset="0"/>
+              </a:rPr>
+              <a:t> →</a:t>
+            </a:r>
+            <a:endParaRPr lang="en-US" dirty="0">
+              <a:latin typeface="Arial" panose="020B0604020202020204" pitchFamily="34" charset="0"/>
+              <a:cs typeface="Arial" panose="020B0604020202020204" pitchFamily="34" charset="0"/>
+            </a:endParaRPr>
+          </a:p>
+        </p:txBody>
+      </p:sp>
+      <p:sp>
+        <p:nvSpPr>
+          <p:cNvPr id="15" name="TextBox 14">
+            <a:extLst>
+              <a:ext uri="{FF2B5EF4-FFF2-40B4-BE49-F238E27FC236}">
+                <a16:creationId xmlns:a16="http://schemas.microsoft.com/office/drawing/2014/main" id="{A24FF4B9-A0C0-2B02-FC76-8B36C52AE56F}"/>
+              </a:ext>
+            </a:extLst>
+          </p:cNvPr>
+          <p:cNvSpPr txBox="1"/>
+          <p:nvPr/>
+        </p:nvSpPr>
+        <p:spPr>
+          <a:xfrm>
+            <a:off x="9381750" y="6259686"/>
+            <a:ext cx="1381532" cy="369332"/>
+          </a:xfrm>
+          <a:prstGeom prst="rect">
+            <a:avLst/>
+          </a:prstGeom>
+          <a:noFill/>
+        </p:spPr>
+        <p:txBody>
+          <a:bodyPr wrap="none" rtlCol="0">
+            <a:spAutoFit/>
+          </a:bodyPr>
+          <a:lstStyle/>
+          <a:p>
+            <a:r>
+              <a:rPr lang="en-US" dirty="0">
+                <a:latin typeface="Arial" panose="020B0604020202020204" pitchFamily="34" charset="0"/>
+                <a:cs typeface="Arial" panose="020B0604020202020204" pitchFamily="34" charset="0"/>
+              </a:rPr>
+              <a:t>Track Index</a:t>
+            </a:r>
+          </a:p>
+        </p:txBody>
+      </p:sp>
+    </p:spTree>
+    <p:extLst>
+      <p:ext uri="{BB962C8B-B14F-4D97-AF65-F5344CB8AC3E}">
+        <p14:creationId xmlns:p14="http://schemas.microsoft.com/office/powerpoint/2010/main" val="2168070692"/>
+      </p:ext>
+    </p:extLst>
+  </p:cSld>
+  <p:clrMapOvr>
+    <a:masterClrMapping/>
+  </p:clrMapOvr>
+</p:sld>
+</file>
+
+<file path=ppt/slides/slide11.xml><?xml version="1.0" encoding="utf-8"?>
+<p:sld xmlns:a="http://schemas.openxmlformats.org/drawingml/2006/main" xmlns:r="http://schemas.openxmlformats.org/officeDocument/2006/relationships" xmlns:p="http://schemas.openxmlformats.org/presentationml/2006/main">
+  <p:cSld>
+    <p:spTree>
+      <p:nvGrpSpPr>
+        <p:cNvPr id="1" name="">
+          <a:extLst>
+            <a:ext uri="{FF2B5EF4-FFF2-40B4-BE49-F238E27FC236}">
               <a16:creationId xmlns:a16="http://schemas.microsoft.com/office/drawing/2014/main" id="{9B4AE523-DB7C-9BB6-1C3B-E075964C515F}"/>
             </a:ext>
           </a:extLst>
@@ -2767,7 +3194,7 @@
 </p:sld>
 </file>
 
-<file path=ppt/slides/slide11.xml><?xml version="1.0" encoding="utf-8"?>
+<file path=ppt/slides/slide12.xml><?xml version="1.0" encoding="utf-8"?>
 <p:sld xmlns:a="http://schemas.openxmlformats.org/drawingml/2006/main" xmlns:r="http://schemas.openxmlformats.org/officeDocument/2006/relationships" xmlns:p="http://schemas.openxmlformats.org/presentationml/2006/main">
   <p:cSld>
     <p:spTree>
@@ -2849,7 +3276,7 @@
 </p:sld>
 </file>
 
-<file path=ppt/slides/slide12.xml><?xml version="1.0" encoding="utf-8"?>
+<file path=ppt/slides/slide13.xml><?xml version="1.0" encoding="utf-8"?>
 <p:sld xmlns:a="http://schemas.openxmlformats.org/drawingml/2006/main" xmlns:r="http://schemas.openxmlformats.org/officeDocument/2006/relationships" xmlns:p="http://schemas.openxmlformats.org/presentationml/2006/main">
   <p:cSld>
     <p:spTree>
@@ -2931,7 +3358,7 @@
 </p:sld>
 </file>
 
-<file path=ppt/slides/slide13.xml><?xml version="1.0" encoding="utf-8"?>
+<file path=ppt/slides/slide14.xml><?xml version="1.0" encoding="utf-8"?>
 <p:sld xmlns:a="http://schemas.openxmlformats.org/drawingml/2006/main" xmlns:r="http://schemas.openxmlformats.org/officeDocument/2006/relationships" xmlns:p="http://schemas.openxmlformats.org/presentationml/2006/main">
   <p:cSld>
     <p:spTree>
@@ -3013,7 +3440,7 @@
 </p:sld>
 </file>
 
-<file path=ppt/slides/slide14.xml><?xml version="1.0" encoding="utf-8"?>
+<file path=ppt/slides/slide15.xml><?xml version="1.0" encoding="utf-8"?>
 <p:sld xmlns:a="http://schemas.openxmlformats.org/drawingml/2006/main" xmlns:r="http://schemas.openxmlformats.org/officeDocument/2006/relationships" xmlns:p="http://schemas.openxmlformats.org/presentationml/2006/main">
   <p:cSld>
     <p:spTree>
@@ -3095,7 +3522,7 @@
 </p:sld>
 </file>
 
-<file path=ppt/slides/slide15.xml><?xml version="1.0" encoding="utf-8"?>
+<file path=ppt/slides/slide16.xml><?xml version="1.0" encoding="utf-8"?>
 <p:sld xmlns:a="http://schemas.openxmlformats.org/drawingml/2006/main" xmlns:r="http://schemas.openxmlformats.org/officeDocument/2006/relationships" xmlns:p="http://schemas.openxmlformats.org/presentationml/2006/main">
   <p:cSld>
     <p:spTree>
@@ -3177,7 +3604,7 @@
 </p:sld>
 </file>
 
-<file path=ppt/slides/slide16.xml><?xml version="1.0" encoding="utf-8"?>
+<file path=ppt/slides/slide17.xml><?xml version="1.0" encoding="utf-8"?>
 <p:sld xmlns:a="http://schemas.openxmlformats.org/drawingml/2006/main" xmlns:r="http://schemas.openxmlformats.org/officeDocument/2006/relationships" xmlns:p="http://schemas.openxmlformats.org/presentationml/2006/main">
   <p:cSld>
     <p:spTree>
@@ -4290,6 +4717,253 @@
         <p:cNvPr id="1" name="">
           <a:extLst>
             <a:ext uri="{FF2B5EF4-FFF2-40B4-BE49-F238E27FC236}">
+              <a16:creationId xmlns:a16="http://schemas.microsoft.com/office/drawing/2014/main" id="{EE4544CA-936B-7116-F707-596BF2A9F001}"/>
+            </a:ext>
+          </a:extLst>
+        </p:cNvPr>
+        <p:cNvGrpSpPr/>
+        <p:nvPr/>
+      </p:nvGrpSpPr>
+      <p:grpSpPr>
+        <a:xfrm>
+          <a:off x="0" y="0"/>
+          <a:ext cx="0" cy="0"/>
+          <a:chOff x="0" y="0"/>
+          <a:chExt cx="0" cy="0"/>
+        </a:xfrm>
+      </p:grpSpPr>
+      <p:sp>
+        <p:nvSpPr>
+          <p:cNvPr id="2" name="TextBox 1">
+            <a:extLst>
+              <a:ext uri="{FF2B5EF4-FFF2-40B4-BE49-F238E27FC236}">
+                <a16:creationId xmlns:a16="http://schemas.microsoft.com/office/drawing/2014/main" id="{5B9BBDD2-9904-A7D5-4E41-5E71F671C433}"/>
+              </a:ext>
+            </a:extLst>
+          </p:cNvPr>
+          <p:cNvSpPr txBox="1"/>
+          <p:nvPr/>
+        </p:nvSpPr>
+        <p:spPr>
+          <a:xfrm>
+            <a:off x="227066" y="141706"/>
+            <a:ext cx="2517036" cy="461665"/>
+          </a:xfrm>
+          <a:prstGeom prst="rect">
+            <a:avLst/>
+          </a:prstGeom>
+          <a:noFill/>
+        </p:spPr>
+        <p:txBody>
+          <a:bodyPr wrap="none" rtlCol="0">
+            <a:spAutoFit/>
+          </a:bodyPr>
+          <a:lstStyle/>
+          <a:p>
+            <a:pPr marL="342900" indent="-342900">
+              <a:buFont typeface="Wingdings" panose="05000000000000000000" pitchFamily="2" charset="2"/>
+              <a:buChar char="Ø"/>
+            </a:pPr>
+            <a:r>
+              <a:rPr lang="en-US" altLang="zh-CN" sz="2400" b="1" dirty="0" err="1">
+                <a:latin typeface="Arial" panose="020B0604020202020204" pitchFamily="34" charset="0"/>
+                <a:cs typeface="Arial" panose="020B0604020202020204" pitchFamily="34" charset="0"/>
+              </a:rPr>
+              <a:t>Georeference</a:t>
+            </a:r>
+            <a:endParaRPr lang="en-US" sz="2400" b="1" dirty="0">
+              <a:latin typeface="Arial" panose="020B0604020202020204" pitchFamily="34" charset="0"/>
+              <a:cs typeface="Arial" panose="020B0604020202020204" pitchFamily="34" charset="0"/>
+            </a:endParaRPr>
+          </a:p>
+        </p:txBody>
+      </p:sp>
+      <p:sp>
+        <p:nvSpPr>
+          <p:cNvPr id="4" name="TextBox 3">
+            <a:extLst>
+              <a:ext uri="{FF2B5EF4-FFF2-40B4-BE49-F238E27FC236}">
+                <a16:creationId xmlns:a16="http://schemas.microsoft.com/office/drawing/2014/main" id="{83BB6C08-E07C-1265-235C-01705E9E8681}"/>
+              </a:ext>
+            </a:extLst>
+          </p:cNvPr>
+          <p:cNvSpPr txBox="1"/>
+          <p:nvPr/>
+        </p:nvSpPr>
+        <p:spPr>
+          <a:xfrm>
+            <a:off x="573742" y="603371"/>
+            <a:ext cx="11080376" cy="5442516"/>
+          </a:xfrm>
+          <a:prstGeom prst="rect">
+            <a:avLst/>
+          </a:prstGeom>
+          <a:noFill/>
+        </p:spPr>
+        <p:txBody>
+          <a:bodyPr wrap="square">
+            <a:spAutoFit/>
+          </a:bodyPr>
+          <a:lstStyle/>
+          <a:p>
+            <a:pPr algn="just">
+              <a:lnSpc>
+                <a:spcPct val="150000"/>
+              </a:lnSpc>
+            </a:pPr>
+            <a:r>
+              <a:rPr lang="en-US" dirty="0">
+                <a:latin typeface="Arial" panose="020B0604020202020204" pitchFamily="34" charset="0"/>
+                <a:cs typeface="Arial" panose="020B0604020202020204" pitchFamily="34" charset="0"/>
+              </a:rPr>
+              <a:t>Time-tagged LiDAR data (Tx start time + Rx samples) + platform navigation (position/attitude). Airborne demo explicitly uses </a:t>
+            </a:r>
+            <a:r>
+              <a:rPr lang="en-US" dirty="0" err="1">
+                <a:latin typeface="Arial" panose="020B0604020202020204" pitchFamily="34" charset="0"/>
+                <a:cs typeface="Arial" panose="020B0604020202020204" pitchFamily="34" charset="0"/>
+              </a:rPr>
+              <a:t>Applanix</a:t>
+            </a:r>
+            <a:r>
+              <a:rPr lang="en-US" dirty="0">
+                <a:latin typeface="Arial" panose="020B0604020202020204" pitchFamily="34" charset="0"/>
+                <a:cs typeface="Arial" panose="020B0604020202020204" pitchFamily="34" charset="0"/>
+              </a:rPr>
+              <a:t> POS AVX 510 and reports ~1 m footprint geolocation accuracy (1</a:t>
+            </a:r>
+            <a:r>
+              <a:rPr lang="el-GR" dirty="0">
+                <a:latin typeface="Arial" panose="020B0604020202020204" pitchFamily="34" charset="0"/>
+                <a:cs typeface="Arial" panose="020B0604020202020204" pitchFamily="34" charset="0"/>
+              </a:rPr>
+              <a:t>σ) </a:t>
+            </a:r>
+            <a:r>
+              <a:rPr lang="en-US" dirty="0">
+                <a:latin typeface="Arial" panose="020B0604020202020204" pitchFamily="34" charset="0"/>
+                <a:cs typeface="Arial" panose="020B0604020202020204" pitchFamily="34" charset="0"/>
+              </a:rPr>
+              <a:t>from 8.5 km, with over-water maneuvers to estimate pointing biases.</a:t>
+            </a:r>
+          </a:p>
+          <a:p>
+            <a:pPr algn="just">
+              <a:lnSpc>
+                <a:spcPct val="150000"/>
+              </a:lnSpc>
+            </a:pPr>
+            <a:r>
+              <a:rPr lang="en-US" b="1" dirty="0">
+                <a:latin typeface="Arial" panose="020B0604020202020204" pitchFamily="34" charset="0"/>
+                <a:cs typeface="Arial" panose="020B0604020202020204" pitchFamily="34" charset="0"/>
+              </a:rPr>
+              <a:t>Steps:</a:t>
+            </a:r>
+          </a:p>
+          <a:p>
+            <a:pPr marL="342900" indent="-342900" algn="just">
+              <a:lnSpc>
+                <a:spcPct val="150000"/>
+              </a:lnSpc>
+              <a:buFont typeface="+mj-lt"/>
+              <a:buAutoNum type="arabicPeriod"/>
+            </a:pPr>
+            <a:r>
+              <a:rPr lang="en-US" dirty="0">
+                <a:latin typeface="Arial" panose="020B0604020202020204" pitchFamily="34" charset="0"/>
+                <a:cs typeface="Arial" panose="020B0604020202020204" pitchFamily="34" charset="0"/>
+              </a:rPr>
+              <a:t>Time alignment: synchronize LiDAR row/footprint timestamps to GNSS/INS time.</a:t>
+            </a:r>
+          </a:p>
+          <a:p>
+            <a:pPr marL="342900" indent="-342900" algn="just">
+              <a:lnSpc>
+                <a:spcPct val="150000"/>
+              </a:lnSpc>
+              <a:buFont typeface="+mj-lt"/>
+              <a:buAutoNum type="arabicPeriod"/>
+            </a:pPr>
+            <a:r>
+              <a:rPr lang="en-US" dirty="0">
+                <a:latin typeface="Arial" panose="020B0604020202020204" pitchFamily="34" charset="0"/>
+                <a:cs typeface="Arial" panose="020B0604020202020204" pitchFamily="34" charset="0"/>
+              </a:rPr>
+              <a:t>Range retrieval: estimate range to scattering surfaces from waveform timing relative to start pulse (Tx) and Rx gate.</a:t>
+            </a:r>
+          </a:p>
+          <a:p>
+            <a:pPr marL="342900" indent="-342900" algn="just">
+              <a:lnSpc>
+                <a:spcPct val="150000"/>
+              </a:lnSpc>
+              <a:buFont typeface="+mj-lt"/>
+              <a:buAutoNum type="arabicPeriod"/>
+            </a:pPr>
+            <a:r>
+              <a:rPr lang="en-US" dirty="0">
+                <a:latin typeface="Arial" panose="020B0604020202020204" pitchFamily="34" charset="0"/>
+                <a:cs typeface="Arial" panose="020B0604020202020204" pitchFamily="34" charset="0"/>
+              </a:rPr>
+              <a:t>Pointing model: convert wavelength channel → cross-track angle (calibrated wavelength-to-angle map) + apply attitude (roll/pitch/yaw) + boresight.</a:t>
+            </a:r>
+          </a:p>
+          <a:p>
+            <a:pPr marL="342900" indent="-342900" algn="just">
+              <a:lnSpc>
+                <a:spcPct val="150000"/>
+              </a:lnSpc>
+              <a:buFont typeface="+mj-lt"/>
+              <a:buAutoNum type="arabicPeriod"/>
+            </a:pPr>
+            <a:r>
+              <a:rPr lang="en-US" dirty="0">
+                <a:latin typeface="Arial" panose="020B0604020202020204" pitchFamily="34" charset="0"/>
+                <a:cs typeface="Arial" panose="020B0604020202020204" pitchFamily="34" charset="0"/>
+              </a:rPr>
+              <a:t>Ray–surface intersection: intersect LOS with Earth ellipsoid/DEM (or use waveform-derived range to solve 3D point along the LOS).</a:t>
+            </a:r>
+          </a:p>
+          <a:p>
+            <a:pPr marL="342900" indent="-342900" algn="just">
+              <a:lnSpc>
+                <a:spcPct val="150000"/>
+              </a:lnSpc>
+              <a:buFont typeface="+mj-lt"/>
+              <a:buAutoNum type="arabicPeriod"/>
+            </a:pPr>
+            <a:r>
+              <a:rPr lang="en-US" dirty="0">
+                <a:latin typeface="Arial" panose="020B0604020202020204" pitchFamily="34" charset="0"/>
+                <a:cs typeface="Arial" panose="020B0604020202020204" pitchFamily="34" charset="0"/>
+              </a:rPr>
+              <a:t>Calibration/refinement: solve residual biases (boresight, lever-arm, timing) using dedicated maneuvers / control surfaces; propagate uncertainties to products.</a:t>
+            </a:r>
+          </a:p>
+        </p:txBody>
+      </p:sp>
+    </p:spTree>
+    <p:extLst>
+      <p:ext uri="{BB962C8B-B14F-4D97-AF65-F5344CB8AC3E}">
+        <p14:creationId xmlns:p14="http://schemas.microsoft.com/office/powerpoint/2010/main" val="3479097923"/>
+      </p:ext>
+    </p:extLst>
+  </p:cSld>
+  <p:clrMapOvr>
+    <a:masterClrMapping/>
+  </p:clrMapOvr>
+</p:sld>
+</file>
+
+<file path=ppt/slides/slide6.xml><?xml version="1.0" encoding="utf-8"?>
+<p:sld xmlns:a="http://schemas.openxmlformats.org/drawingml/2006/main" xmlns:r="http://schemas.openxmlformats.org/officeDocument/2006/relationships" xmlns:p="http://schemas.openxmlformats.org/presentationml/2006/main">
+  <p:cSld>
+    <p:spTree>
+      <p:nvGrpSpPr>
+        <p:cNvPr id="1" name="">
+          <a:extLst>
+            <a:ext uri="{FF2B5EF4-FFF2-40B4-BE49-F238E27FC236}">
               <a16:creationId xmlns:a16="http://schemas.microsoft.com/office/drawing/2014/main" id="{F4F1FB44-2018-375C-CC66-8B9FB11C774B}"/>
             </a:ext>
           </a:extLst>
@@ -4787,7 +5461,7 @@
 </p:sld>
 </file>
 
-<file path=ppt/slides/slide6.xml><?xml version="1.0" encoding="utf-8"?>
+<file path=ppt/slides/slide7.xml><?xml version="1.0" encoding="utf-8"?>
 <p:sld xmlns:a="http://schemas.openxmlformats.org/drawingml/2006/main" xmlns:r="http://schemas.openxmlformats.org/officeDocument/2006/relationships" xmlns:p="http://schemas.openxmlformats.org/presentationml/2006/main">
   <p:cSld>
     <p:spTree>
@@ -5085,630 +5759,7 @@
 </p:sld>
 </file>
 
-<file path=ppt/slides/slide7.xml><?xml version="1.0" encoding="utf-8"?>
-<p:sld xmlns:a="http://schemas.openxmlformats.org/drawingml/2006/main" xmlns:r="http://schemas.openxmlformats.org/officeDocument/2006/relationships" xmlns:p="http://schemas.openxmlformats.org/presentationml/2006/main">
-  <p:cSld>
-    <p:spTree>
-      <p:nvGrpSpPr>
-        <p:cNvPr id="1" name="">
-          <a:extLst>
-            <a:ext uri="{FF2B5EF4-FFF2-40B4-BE49-F238E27FC236}">
-              <a16:creationId xmlns:a16="http://schemas.microsoft.com/office/drawing/2014/main" id="{75CDF07B-AD59-CA1F-E5A1-3ABFA4FA3F80}"/>
-            </a:ext>
-          </a:extLst>
-        </p:cNvPr>
-        <p:cNvGrpSpPr/>
-        <p:nvPr/>
-      </p:nvGrpSpPr>
-      <p:grpSpPr>
-        <a:xfrm>
-          <a:off x="0" y="0"/>
-          <a:ext cx="0" cy="0"/>
-          <a:chOff x="0" y="0"/>
-          <a:chExt cx="0" cy="0"/>
-        </a:xfrm>
-      </p:grpSpPr>
-      <p:sp>
-        <p:nvSpPr>
-          <p:cNvPr id="2" name="TextBox 1">
-            <a:extLst>
-              <a:ext uri="{FF2B5EF4-FFF2-40B4-BE49-F238E27FC236}">
-                <a16:creationId xmlns:a16="http://schemas.microsoft.com/office/drawing/2014/main" id="{FACB41BD-5286-CD50-0832-79504F037767}"/>
-              </a:ext>
-            </a:extLst>
-          </p:cNvPr>
-          <p:cNvSpPr txBox="1"/>
-          <p:nvPr/>
-        </p:nvSpPr>
-        <p:spPr>
-          <a:xfrm>
-            <a:off x="227066" y="141706"/>
-            <a:ext cx="4870244" cy="461665"/>
-          </a:xfrm>
-          <a:prstGeom prst="rect">
-            <a:avLst/>
-          </a:prstGeom>
-          <a:noFill/>
-        </p:spPr>
-        <p:txBody>
-          <a:bodyPr wrap="none" rtlCol="0">
-            <a:spAutoFit/>
-          </a:bodyPr>
-          <a:lstStyle/>
-          <a:p>
-            <a:pPr marL="342900" indent="-342900">
-              <a:buFont typeface="Wingdings" panose="05000000000000000000" pitchFamily="2" charset="2"/>
-              <a:buChar char="Ø"/>
-            </a:pPr>
-            <a:r>
-              <a:rPr lang="en-US" altLang="zh-CN" sz="2400" b="1" dirty="0">
-                <a:latin typeface="Arial" panose="020B0604020202020204" pitchFamily="34" charset="0"/>
-                <a:cs typeface="Arial" panose="020B0604020202020204" pitchFamily="34" charset="0"/>
-              </a:rPr>
-              <a:t>Nadir-port window reflections</a:t>
-            </a:r>
-            <a:endParaRPr lang="en-US" sz="2400" b="1" dirty="0">
-              <a:latin typeface="Arial" panose="020B0604020202020204" pitchFamily="34" charset="0"/>
-              <a:cs typeface="Arial" panose="020B0604020202020204" pitchFamily="34" charset="0"/>
-            </a:endParaRPr>
-          </a:p>
-        </p:txBody>
-      </p:sp>
-      <p:sp>
-        <p:nvSpPr>
-          <p:cNvPr id="5" name="TextBox 4">
-            <a:extLst>
-              <a:ext uri="{FF2B5EF4-FFF2-40B4-BE49-F238E27FC236}">
-                <a16:creationId xmlns:a16="http://schemas.microsoft.com/office/drawing/2014/main" id="{6F62CDE9-92FF-0A30-C396-84DC910D29E3}"/>
-              </a:ext>
-            </a:extLst>
-          </p:cNvPr>
-          <p:cNvSpPr txBox="1"/>
-          <p:nvPr/>
-        </p:nvSpPr>
-        <p:spPr>
-          <a:xfrm>
-            <a:off x="558530" y="971775"/>
-            <a:ext cx="7216588" cy="4611519"/>
-          </a:xfrm>
-          <a:prstGeom prst="rect">
-            <a:avLst/>
-          </a:prstGeom>
-          <a:noFill/>
-        </p:spPr>
-        <p:txBody>
-          <a:bodyPr wrap="square">
-            <a:spAutoFit/>
-          </a:bodyPr>
-          <a:lstStyle/>
-          <a:p>
-            <a:pPr algn="just">
-              <a:lnSpc>
-                <a:spcPct val="150000"/>
-              </a:lnSpc>
-            </a:pPr>
-            <a:r>
-              <a:rPr lang="en-US" dirty="0">
-                <a:latin typeface="Arial" panose="020B0604020202020204" pitchFamily="34" charset="0"/>
-                <a:cs typeface="Arial" panose="020B0604020202020204" pitchFamily="34" charset="0"/>
-              </a:rPr>
-              <a:t>A “nadir-port window” is a protective optical window in the nadir viewing path. A small fraction of the laser pulse can reflect off that window surface(s) and re-enter the receiver path, creating a strong instrumental ghost (non-geophysical) at a consistent range/time.</a:t>
-            </a:r>
-          </a:p>
-          <a:p>
-            <a:pPr algn="just">
-              <a:lnSpc>
-                <a:spcPct val="150000"/>
-              </a:lnSpc>
-            </a:pPr>
-            <a:endParaRPr lang="en-US" dirty="0">
-              <a:latin typeface="Arial" panose="020B0604020202020204" pitchFamily="34" charset="0"/>
-              <a:cs typeface="Arial" panose="020B0604020202020204" pitchFamily="34" charset="0"/>
-            </a:endParaRPr>
-          </a:p>
-          <a:p>
-            <a:pPr>
-              <a:lnSpc>
-                <a:spcPct val="150000"/>
-              </a:lnSpc>
-              <a:buNone/>
-            </a:pPr>
-            <a:r>
-              <a:rPr lang="en-US" altLang="zh-CN" dirty="0">
-                <a:latin typeface="Arial" panose="020B0604020202020204" pitchFamily="34" charset="0"/>
-                <a:cs typeface="Arial" panose="020B0604020202020204" pitchFamily="34" charset="0"/>
-              </a:rPr>
-              <a:t>Possible ways to </a:t>
-            </a:r>
-            <a:r>
-              <a:rPr lang="en-US" dirty="0">
-                <a:latin typeface="Arial" panose="020B0604020202020204" pitchFamily="34" charset="0"/>
-                <a:cs typeface="Arial" panose="020B0604020202020204" pitchFamily="34" charset="0"/>
-              </a:rPr>
-              <a:t>detect:</a:t>
-            </a:r>
-          </a:p>
-          <a:p>
-            <a:pPr marL="400050" indent="-400050">
-              <a:lnSpc>
-                <a:spcPct val="150000"/>
-              </a:lnSpc>
-              <a:buAutoNum type="romanLcParenBoth"/>
-            </a:pPr>
-            <a:r>
-              <a:rPr lang="en-US" dirty="0">
-                <a:latin typeface="Arial" panose="020B0604020202020204" pitchFamily="34" charset="0"/>
-                <a:cs typeface="Arial" panose="020B0604020202020204" pitchFamily="34" charset="0"/>
-              </a:rPr>
-              <a:t>fixed range bin / early-time consistency</a:t>
-            </a:r>
-          </a:p>
-          <a:p>
-            <a:pPr marL="400050" indent="-400050">
-              <a:lnSpc>
-                <a:spcPct val="150000"/>
-              </a:lnSpc>
-              <a:buAutoNum type="romanLcParenBoth"/>
-            </a:pPr>
-            <a:r>
-              <a:rPr lang="en-US" dirty="0">
-                <a:latin typeface="Arial" panose="020B0604020202020204" pitchFamily="34" charset="0"/>
-                <a:cs typeface="Arial" panose="020B0604020202020204" pitchFamily="34" charset="0"/>
-              </a:rPr>
-              <a:t>abnormal amplitude</a:t>
-            </a:r>
-          </a:p>
-          <a:p>
-            <a:pPr marL="400050" indent="-400050">
-              <a:lnSpc>
-                <a:spcPct val="150000"/>
-              </a:lnSpc>
-              <a:buAutoNum type="romanLcParenBoth"/>
-            </a:pPr>
-            <a:r>
-              <a:rPr lang="en-US" dirty="0">
-                <a:latin typeface="Arial" panose="020B0604020202020204" pitchFamily="34" charset="0"/>
-                <a:cs typeface="Arial" panose="020B0604020202020204" pitchFamily="34" charset="0"/>
-              </a:rPr>
-              <a:t>weak dependence on scene</a:t>
-            </a:r>
-          </a:p>
-          <a:p>
-            <a:pPr marL="400050" indent="-400050">
-              <a:lnSpc>
-                <a:spcPct val="150000"/>
-              </a:lnSpc>
-              <a:buAutoNum type="romanLcParenBoth"/>
-            </a:pPr>
-            <a:r>
-              <a:rPr lang="en-US" dirty="0">
-                <a:latin typeface="Arial" panose="020B0604020202020204" pitchFamily="34" charset="0"/>
-                <a:cs typeface="Arial" panose="020B0604020202020204" pitchFamily="34" charset="0"/>
-              </a:rPr>
-              <a:t>track-localized behavior</a:t>
-            </a:r>
-          </a:p>
-          <a:p>
-            <a:pPr algn="just">
-              <a:lnSpc>
-                <a:spcPct val="150000"/>
-              </a:lnSpc>
-            </a:pPr>
-            <a:endParaRPr lang="en-US" dirty="0">
-              <a:latin typeface="Arial" panose="020B0604020202020204" pitchFamily="34" charset="0"/>
-              <a:cs typeface="Arial" panose="020B0604020202020204" pitchFamily="34" charset="0"/>
-            </a:endParaRPr>
-          </a:p>
-        </p:txBody>
-      </p:sp>
-      <p:pic>
-        <p:nvPicPr>
-          <p:cNvPr id="9" name="Picture 8">
-            <a:extLst>
-              <a:ext uri="{FF2B5EF4-FFF2-40B4-BE49-F238E27FC236}">
-                <a16:creationId xmlns:a16="http://schemas.microsoft.com/office/drawing/2014/main" id="{E0EB5965-0B32-3C5A-4DD0-EEEC10686235}"/>
-              </a:ext>
-            </a:extLst>
-          </p:cNvPr>
-          <p:cNvPicPr>
-            <a:picLocks noChangeAspect="1"/>
-          </p:cNvPicPr>
-          <p:nvPr/>
-        </p:nvPicPr>
-        <p:blipFill>
-          <a:blip r:embed="rId2"/>
-          <a:stretch>
-            <a:fillRect/>
-          </a:stretch>
-        </p:blipFill>
-        <p:spPr>
-          <a:xfrm>
-            <a:off x="8465389" y="368678"/>
-            <a:ext cx="3168081" cy="2855339"/>
-          </a:xfrm>
-          <a:prstGeom prst="rect">
-            <a:avLst/>
-          </a:prstGeom>
-        </p:spPr>
-      </p:pic>
-      <p:pic>
-        <p:nvPicPr>
-          <p:cNvPr id="11" name="Picture 10">
-            <a:extLst>
-              <a:ext uri="{FF2B5EF4-FFF2-40B4-BE49-F238E27FC236}">
-                <a16:creationId xmlns:a16="http://schemas.microsoft.com/office/drawing/2014/main" id="{9DC0813D-C5CF-08ED-C8CD-CCE891C068F6}"/>
-              </a:ext>
-            </a:extLst>
-          </p:cNvPr>
-          <p:cNvPicPr>
-            <a:picLocks noChangeAspect="1"/>
-          </p:cNvPicPr>
-          <p:nvPr/>
-        </p:nvPicPr>
-        <p:blipFill>
-          <a:blip r:embed="rId3"/>
-          <a:stretch>
-            <a:fillRect/>
-          </a:stretch>
-        </p:blipFill>
-        <p:spPr>
-          <a:xfrm rot="10800000">
-            <a:off x="5441576" y="3429000"/>
-            <a:ext cx="6191894" cy="2908856"/>
-          </a:xfrm>
-          <a:prstGeom prst="rect">
-            <a:avLst/>
-          </a:prstGeom>
-        </p:spPr>
-      </p:pic>
-      <p:sp>
-        <p:nvSpPr>
-          <p:cNvPr id="14" name="TextBox 13">
-            <a:extLst>
-              <a:ext uri="{FF2B5EF4-FFF2-40B4-BE49-F238E27FC236}">
-                <a16:creationId xmlns:a16="http://schemas.microsoft.com/office/drawing/2014/main" id="{A68297C5-B857-3E03-63E9-E9380303CF4F}"/>
-              </a:ext>
-            </a:extLst>
-          </p:cNvPr>
-          <p:cNvSpPr txBox="1"/>
-          <p:nvPr/>
-        </p:nvSpPr>
-        <p:spPr>
-          <a:xfrm rot="16200000">
-            <a:off x="4472080" y="4698762"/>
-            <a:ext cx="1569660" cy="369332"/>
-          </a:xfrm>
-          <a:prstGeom prst="rect">
-            <a:avLst/>
-          </a:prstGeom>
-          <a:noFill/>
-        </p:spPr>
-        <p:txBody>
-          <a:bodyPr wrap="none" rtlCol="0">
-            <a:spAutoFit/>
-          </a:bodyPr>
-          <a:lstStyle/>
-          <a:p>
-            <a:r>
-              <a:rPr lang="en-US" dirty="0">
-                <a:latin typeface="Arial" panose="020B0604020202020204" pitchFamily="34" charset="0"/>
-                <a:cs typeface="Arial" panose="020B0604020202020204" pitchFamily="34" charset="0"/>
-              </a:rPr>
-              <a:t>Range (m)</a:t>
-            </a:r>
-            <a:r>
-              <a:rPr lang="zh-CN" altLang="en-US" dirty="0">
-                <a:latin typeface="Arial" panose="020B0604020202020204" pitchFamily="34" charset="0"/>
-                <a:cs typeface="Arial" panose="020B0604020202020204" pitchFamily="34" charset="0"/>
-              </a:rPr>
-              <a:t> →</a:t>
-            </a:r>
-            <a:endParaRPr lang="en-US" dirty="0">
-              <a:latin typeface="Arial" panose="020B0604020202020204" pitchFamily="34" charset="0"/>
-              <a:cs typeface="Arial" panose="020B0604020202020204" pitchFamily="34" charset="0"/>
-            </a:endParaRPr>
-          </a:p>
-        </p:txBody>
-      </p:sp>
-      <p:sp>
-        <p:nvSpPr>
-          <p:cNvPr id="15" name="TextBox 14">
-            <a:extLst>
-              <a:ext uri="{FF2B5EF4-FFF2-40B4-BE49-F238E27FC236}">
-                <a16:creationId xmlns:a16="http://schemas.microsoft.com/office/drawing/2014/main" id="{A24FF4B9-A0C0-2B02-FC76-8B36C52AE56F}"/>
-              </a:ext>
-            </a:extLst>
-          </p:cNvPr>
-          <p:cNvSpPr txBox="1"/>
-          <p:nvPr/>
-        </p:nvSpPr>
-        <p:spPr>
-          <a:xfrm>
-            <a:off x="7846757" y="6277761"/>
-            <a:ext cx="1381532" cy="369332"/>
-          </a:xfrm>
-          <a:prstGeom prst="rect">
-            <a:avLst/>
-          </a:prstGeom>
-          <a:noFill/>
-        </p:spPr>
-        <p:txBody>
-          <a:bodyPr wrap="none" rtlCol="0">
-            <a:spAutoFit/>
-          </a:bodyPr>
-          <a:lstStyle/>
-          <a:p>
-            <a:r>
-              <a:rPr lang="en-US" dirty="0">
-                <a:latin typeface="Arial" panose="020B0604020202020204" pitchFamily="34" charset="0"/>
-                <a:cs typeface="Arial" panose="020B0604020202020204" pitchFamily="34" charset="0"/>
-              </a:rPr>
-              <a:t>Track Index</a:t>
-            </a:r>
-          </a:p>
-        </p:txBody>
-      </p:sp>
-    </p:spTree>
-    <p:extLst>
-      <p:ext uri="{BB962C8B-B14F-4D97-AF65-F5344CB8AC3E}">
-        <p14:creationId xmlns:p14="http://schemas.microsoft.com/office/powerpoint/2010/main" val="2168070692"/>
-      </p:ext>
-    </p:extLst>
-  </p:cSld>
-  <p:clrMapOvr>
-    <a:masterClrMapping/>
-  </p:clrMapOvr>
-</p:sld>
-</file>
-
 <file path=ppt/slides/slide8.xml><?xml version="1.0" encoding="utf-8"?>
-<p:sld xmlns:a="http://schemas.openxmlformats.org/drawingml/2006/main" xmlns:r="http://schemas.openxmlformats.org/officeDocument/2006/relationships" xmlns:p="http://schemas.openxmlformats.org/presentationml/2006/main">
-  <p:cSld>
-    <p:spTree>
-      <p:nvGrpSpPr>
-        <p:cNvPr id="1" name="">
-          <a:extLst>
-            <a:ext uri="{FF2B5EF4-FFF2-40B4-BE49-F238E27FC236}">
-              <a16:creationId xmlns:a16="http://schemas.microsoft.com/office/drawing/2014/main" id="{EE4544CA-936B-7116-F707-596BF2A9F001}"/>
-            </a:ext>
-          </a:extLst>
-        </p:cNvPr>
-        <p:cNvGrpSpPr/>
-        <p:nvPr/>
-      </p:nvGrpSpPr>
-      <p:grpSpPr>
-        <a:xfrm>
-          <a:off x="0" y="0"/>
-          <a:ext cx="0" cy="0"/>
-          <a:chOff x="0" y="0"/>
-          <a:chExt cx="0" cy="0"/>
-        </a:xfrm>
-      </p:grpSpPr>
-      <p:sp>
-        <p:nvSpPr>
-          <p:cNvPr id="2" name="TextBox 1">
-            <a:extLst>
-              <a:ext uri="{FF2B5EF4-FFF2-40B4-BE49-F238E27FC236}">
-                <a16:creationId xmlns:a16="http://schemas.microsoft.com/office/drawing/2014/main" id="{5B9BBDD2-9904-A7D5-4E41-5E71F671C433}"/>
-              </a:ext>
-            </a:extLst>
-          </p:cNvPr>
-          <p:cNvSpPr txBox="1"/>
-          <p:nvPr/>
-        </p:nvSpPr>
-        <p:spPr>
-          <a:xfrm>
-            <a:off x="227066" y="141706"/>
-            <a:ext cx="2517036" cy="461665"/>
-          </a:xfrm>
-          <a:prstGeom prst="rect">
-            <a:avLst/>
-          </a:prstGeom>
-          <a:noFill/>
-        </p:spPr>
-        <p:txBody>
-          <a:bodyPr wrap="none" rtlCol="0">
-            <a:spAutoFit/>
-          </a:bodyPr>
-          <a:lstStyle/>
-          <a:p>
-            <a:pPr marL="342900" indent="-342900">
-              <a:buFont typeface="Wingdings" panose="05000000000000000000" pitchFamily="2" charset="2"/>
-              <a:buChar char="Ø"/>
-            </a:pPr>
-            <a:r>
-              <a:rPr lang="en-US" altLang="zh-CN" sz="2400" b="1" dirty="0" err="1">
-                <a:latin typeface="Arial" panose="020B0604020202020204" pitchFamily="34" charset="0"/>
-                <a:cs typeface="Arial" panose="020B0604020202020204" pitchFamily="34" charset="0"/>
-              </a:rPr>
-              <a:t>Georeference</a:t>
-            </a:r>
-            <a:endParaRPr lang="en-US" sz="2400" b="1" dirty="0">
-              <a:latin typeface="Arial" panose="020B0604020202020204" pitchFamily="34" charset="0"/>
-              <a:cs typeface="Arial" panose="020B0604020202020204" pitchFamily="34" charset="0"/>
-            </a:endParaRPr>
-          </a:p>
-        </p:txBody>
-      </p:sp>
-      <p:sp>
-        <p:nvSpPr>
-          <p:cNvPr id="4" name="TextBox 3">
-            <a:extLst>
-              <a:ext uri="{FF2B5EF4-FFF2-40B4-BE49-F238E27FC236}">
-                <a16:creationId xmlns:a16="http://schemas.microsoft.com/office/drawing/2014/main" id="{83BB6C08-E07C-1265-235C-01705E9E8681}"/>
-              </a:ext>
-            </a:extLst>
-          </p:cNvPr>
-          <p:cNvSpPr txBox="1"/>
-          <p:nvPr/>
-        </p:nvSpPr>
-        <p:spPr>
-          <a:xfrm>
-            <a:off x="573742" y="603371"/>
-            <a:ext cx="11080376" cy="5442516"/>
-          </a:xfrm>
-          <a:prstGeom prst="rect">
-            <a:avLst/>
-          </a:prstGeom>
-          <a:noFill/>
-        </p:spPr>
-        <p:txBody>
-          <a:bodyPr wrap="square">
-            <a:spAutoFit/>
-          </a:bodyPr>
-          <a:lstStyle/>
-          <a:p>
-            <a:pPr algn="just">
-              <a:lnSpc>
-                <a:spcPct val="150000"/>
-              </a:lnSpc>
-            </a:pPr>
-            <a:r>
-              <a:rPr lang="en-US" dirty="0">
-                <a:latin typeface="Arial" panose="020B0604020202020204" pitchFamily="34" charset="0"/>
-                <a:cs typeface="Arial" panose="020B0604020202020204" pitchFamily="34" charset="0"/>
-              </a:rPr>
-              <a:t>Time-tagged LiDAR data (Tx start time + Rx samples) + platform navigation (position/attitude). Airborne demo explicitly uses </a:t>
-            </a:r>
-            <a:r>
-              <a:rPr lang="en-US" dirty="0" err="1">
-                <a:latin typeface="Arial" panose="020B0604020202020204" pitchFamily="34" charset="0"/>
-                <a:cs typeface="Arial" panose="020B0604020202020204" pitchFamily="34" charset="0"/>
-              </a:rPr>
-              <a:t>Applanix</a:t>
-            </a:r>
-            <a:r>
-              <a:rPr lang="en-US" dirty="0">
-                <a:latin typeface="Arial" panose="020B0604020202020204" pitchFamily="34" charset="0"/>
-                <a:cs typeface="Arial" panose="020B0604020202020204" pitchFamily="34" charset="0"/>
-              </a:rPr>
-              <a:t> POS AVX 510 and reports ~1 m footprint geolocation accuracy (1</a:t>
-            </a:r>
-            <a:r>
-              <a:rPr lang="el-GR" dirty="0">
-                <a:latin typeface="Arial" panose="020B0604020202020204" pitchFamily="34" charset="0"/>
-                <a:cs typeface="Arial" panose="020B0604020202020204" pitchFamily="34" charset="0"/>
-              </a:rPr>
-              <a:t>σ) </a:t>
-            </a:r>
-            <a:r>
-              <a:rPr lang="en-US" dirty="0">
-                <a:latin typeface="Arial" panose="020B0604020202020204" pitchFamily="34" charset="0"/>
-                <a:cs typeface="Arial" panose="020B0604020202020204" pitchFamily="34" charset="0"/>
-              </a:rPr>
-              <a:t>from 8.5 km, with over-water maneuvers to estimate pointing biases.</a:t>
-            </a:r>
-          </a:p>
-          <a:p>
-            <a:pPr algn="just">
-              <a:lnSpc>
-                <a:spcPct val="150000"/>
-              </a:lnSpc>
-            </a:pPr>
-            <a:r>
-              <a:rPr lang="en-US" b="1" dirty="0">
-                <a:latin typeface="Arial" panose="020B0604020202020204" pitchFamily="34" charset="0"/>
-                <a:cs typeface="Arial" panose="020B0604020202020204" pitchFamily="34" charset="0"/>
-              </a:rPr>
-              <a:t>Steps:</a:t>
-            </a:r>
-          </a:p>
-          <a:p>
-            <a:pPr marL="342900" indent="-342900" algn="just">
-              <a:lnSpc>
-                <a:spcPct val="150000"/>
-              </a:lnSpc>
-              <a:buFont typeface="+mj-lt"/>
-              <a:buAutoNum type="arabicPeriod"/>
-            </a:pPr>
-            <a:r>
-              <a:rPr lang="en-US" dirty="0">
-                <a:latin typeface="Arial" panose="020B0604020202020204" pitchFamily="34" charset="0"/>
-                <a:cs typeface="Arial" panose="020B0604020202020204" pitchFamily="34" charset="0"/>
-              </a:rPr>
-              <a:t>Time alignment: synchronize LiDAR row/footprint timestamps to GNSS/INS time.</a:t>
-            </a:r>
-          </a:p>
-          <a:p>
-            <a:pPr marL="342900" indent="-342900" algn="just">
-              <a:lnSpc>
-                <a:spcPct val="150000"/>
-              </a:lnSpc>
-              <a:buFont typeface="+mj-lt"/>
-              <a:buAutoNum type="arabicPeriod"/>
-            </a:pPr>
-            <a:r>
-              <a:rPr lang="en-US" dirty="0">
-                <a:latin typeface="Arial" panose="020B0604020202020204" pitchFamily="34" charset="0"/>
-                <a:cs typeface="Arial" panose="020B0604020202020204" pitchFamily="34" charset="0"/>
-              </a:rPr>
-              <a:t>Range retrieval: estimate range to scattering surfaces from waveform timing relative to start pulse (Tx) and Rx gate.</a:t>
-            </a:r>
-          </a:p>
-          <a:p>
-            <a:pPr marL="342900" indent="-342900" algn="just">
-              <a:lnSpc>
-                <a:spcPct val="150000"/>
-              </a:lnSpc>
-              <a:buFont typeface="+mj-lt"/>
-              <a:buAutoNum type="arabicPeriod"/>
-            </a:pPr>
-            <a:r>
-              <a:rPr lang="en-US" dirty="0">
-                <a:latin typeface="Arial" panose="020B0604020202020204" pitchFamily="34" charset="0"/>
-                <a:cs typeface="Arial" panose="020B0604020202020204" pitchFamily="34" charset="0"/>
-              </a:rPr>
-              <a:t>Pointing model: convert wavelength channel → cross-track angle (calibrated wavelength-to-angle map) + apply attitude (roll/pitch/yaw) + boresight.</a:t>
-            </a:r>
-          </a:p>
-          <a:p>
-            <a:pPr marL="342900" indent="-342900" algn="just">
-              <a:lnSpc>
-                <a:spcPct val="150000"/>
-              </a:lnSpc>
-              <a:buFont typeface="+mj-lt"/>
-              <a:buAutoNum type="arabicPeriod"/>
-            </a:pPr>
-            <a:r>
-              <a:rPr lang="en-US" dirty="0">
-                <a:latin typeface="Arial" panose="020B0604020202020204" pitchFamily="34" charset="0"/>
-                <a:cs typeface="Arial" panose="020B0604020202020204" pitchFamily="34" charset="0"/>
-              </a:rPr>
-              <a:t>Ray–surface intersection: intersect LOS with Earth ellipsoid/DEM (or use waveform-derived range to solve 3D point along the LOS).</a:t>
-            </a:r>
-          </a:p>
-          <a:p>
-            <a:pPr marL="342900" indent="-342900" algn="just">
-              <a:lnSpc>
-                <a:spcPct val="150000"/>
-              </a:lnSpc>
-              <a:buFont typeface="+mj-lt"/>
-              <a:buAutoNum type="arabicPeriod"/>
-            </a:pPr>
-            <a:r>
-              <a:rPr lang="en-US" dirty="0">
-                <a:latin typeface="Arial" panose="020B0604020202020204" pitchFamily="34" charset="0"/>
-                <a:cs typeface="Arial" panose="020B0604020202020204" pitchFamily="34" charset="0"/>
-              </a:rPr>
-              <a:t>Calibration/refinement: solve residual biases (boresight, lever-arm, timing) using dedicated maneuvers / control surfaces; propagate uncertainties to products.</a:t>
-            </a:r>
-          </a:p>
-        </p:txBody>
-      </p:sp>
-    </p:spTree>
-    <p:extLst>
-      <p:ext uri="{BB962C8B-B14F-4D97-AF65-F5344CB8AC3E}">
-        <p14:creationId xmlns:p14="http://schemas.microsoft.com/office/powerpoint/2010/main" val="3479097923"/>
-      </p:ext>
-    </p:extLst>
-  </p:cSld>
-  <p:clrMapOvr>
-    <a:masterClrMapping/>
-  </p:clrMapOvr>
-</p:sld>
-</file>
-
-<file path=ppt/slides/slide9.xml><?xml version="1.0" encoding="utf-8"?>
 <p:sld xmlns:a="http://schemas.openxmlformats.org/drawingml/2006/main" xmlns:r="http://schemas.openxmlformats.org/officeDocument/2006/relationships" xmlns:p="http://schemas.openxmlformats.org/presentationml/2006/main">
   <p:cSld>
     <p:spTree>
@@ -5746,7 +5797,7 @@
         <p:spPr>
           <a:xfrm>
             <a:off x="227066" y="141706"/>
-            <a:ext cx="5430910" cy="461665"/>
+            <a:ext cx="6575454" cy="461665"/>
           </a:xfrm>
           <a:prstGeom prst="rect">
             <a:avLst/>
@@ -5768,12 +5819,653 @@
                 <a:latin typeface="Arial" panose="020B0604020202020204" pitchFamily="34" charset="0"/>
                 <a:cs typeface="Arial" panose="020B0604020202020204" pitchFamily="34" charset="0"/>
               </a:rPr>
-              <a:t>Airborne / UAV observation mode</a:t>
+              <a:t>Airborne / UAV observation mode - TDMS</a:t>
             </a:r>
             <a:endParaRPr lang="en-US" sz="2400" b="1" dirty="0">
               <a:latin typeface="Arial" panose="020B0604020202020204" pitchFamily="34" charset="0"/>
               <a:cs typeface="Arial" panose="020B0604020202020204" pitchFamily="34" charset="0"/>
             </a:endParaRPr>
+          </a:p>
+        </p:txBody>
+      </p:sp>
+      <p:sp>
+        <p:nvSpPr>
+          <p:cNvPr id="4" name="TextBox 3">
+            <a:extLst>
+              <a:ext uri="{FF2B5EF4-FFF2-40B4-BE49-F238E27FC236}">
+                <a16:creationId xmlns:a16="http://schemas.microsoft.com/office/drawing/2014/main" id="{E49C68B1-C0E8-1FCA-B6DD-8223374AB53A}"/>
+              </a:ext>
+            </a:extLst>
+          </p:cNvPr>
+          <p:cNvSpPr txBox="1"/>
+          <p:nvPr/>
+        </p:nvSpPr>
+        <p:spPr>
+          <a:xfrm>
+            <a:off x="346897" y="651340"/>
+            <a:ext cx="11498205" cy="5893921"/>
+          </a:xfrm>
+          <a:prstGeom prst="rect">
+            <a:avLst/>
+          </a:prstGeom>
+          <a:noFill/>
+        </p:spPr>
+        <p:txBody>
+          <a:bodyPr wrap="square">
+            <a:spAutoFit/>
+          </a:bodyPr>
+          <a:lstStyle/>
+          <a:p>
+            <a:pPr algn="just">
+              <a:spcAft>
+                <a:spcPts val="600"/>
+              </a:spcAft>
+            </a:pPr>
+            <a:r>
+              <a:rPr lang="en-US" sz="1600" b="1" i="0" dirty="0">
+                <a:effectLst/>
+                <a:latin typeface="Arial" panose="020B0604020202020204" pitchFamily="34" charset="0"/>
+                <a:cs typeface="Arial" panose="020B0604020202020204" pitchFamily="34" charset="0"/>
+              </a:rPr>
+              <a:t>What the file represents (</a:t>
+            </a:r>
+            <a:r>
+              <a:rPr lang="en-US" sz="1600" b="1" i="0" dirty="0" err="1">
+                <a:effectLst/>
+                <a:latin typeface="Arial" panose="020B0604020202020204" pitchFamily="34" charset="0"/>
+                <a:cs typeface="Arial" panose="020B0604020202020204" pitchFamily="34" charset="0"/>
+              </a:rPr>
+              <a:t>pushbroom</a:t>
+            </a:r>
+            <a:r>
+              <a:rPr lang="en-US" sz="1600" b="1" i="0" dirty="0">
+                <a:effectLst/>
+                <a:latin typeface="Arial" panose="020B0604020202020204" pitchFamily="34" charset="0"/>
+                <a:cs typeface="Arial" panose="020B0604020202020204" pitchFamily="34" charset="0"/>
+              </a:rPr>
+              <a:t> waveform LiDAR)</a:t>
+            </a:r>
+            <a:endParaRPr lang="en-US" sz="1600" b="0" i="0" dirty="0">
+              <a:effectLst/>
+              <a:latin typeface="Arial" panose="020B0604020202020204" pitchFamily="34" charset="0"/>
+              <a:cs typeface="Arial" panose="020B0604020202020204" pitchFamily="34" charset="0"/>
+            </a:endParaRPr>
+          </a:p>
+          <a:p>
+            <a:pPr marL="742950" lvl="1" indent="-285750" algn="just">
+              <a:spcAft>
+                <a:spcPts val="600"/>
+              </a:spcAft>
+              <a:buFont typeface="Arial" panose="020B0604020202020204" pitchFamily="34" charset="0"/>
+              <a:buChar char="•"/>
+            </a:pPr>
+            <a:r>
+              <a:rPr lang="en-US" sz="1600" b="0" i="0" dirty="0">
+                <a:effectLst/>
+                <a:latin typeface="Arial" panose="020B0604020202020204" pitchFamily="34" charset="0"/>
+                <a:cs typeface="Arial" panose="020B0604020202020204" pitchFamily="34" charset="0"/>
+              </a:rPr>
+              <a:t>A TDMS file stores many along-track advances called </a:t>
+            </a:r>
+            <a:r>
+              <a:rPr lang="en-US" sz="1600" b="1" i="0" dirty="0">
+                <a:effectLst/>
+                <a:latin typeface="Arial" panose="020B0604020202020204" pitchFamily="34" charset="0"/>
+                <a:cs typeface="Arial" panose="020B0604020202020204" pitchFamily="34" charset="0"/>
+              </a:rPr>
+              <a:t>rows</a:t>
+            </a:r>
+            <a:r>
+              <a:rPr lang="en-US" sz="1600" b="0" i="0" dirty="0">
+                <a:effectLst/>
+                <a:latin typeface="Arial" panose="020B0604020202020204" pitchFamily="34" charset="0"/>
+                <a:cs typeface="Arial" panose="020B0604020202020204" pitchFamily="34" charset="0"/>
+              </a:rPr>
+              <a:t>.</a:t>
+            </a:r>
+          </a:p>
+          <a:p>
+            <a:pPr marL="742950" lvl="1" indent="-285750" algn="just">
+              <a:spcAft>
+                <a:spcPts val="600"/>
+              </a:spcAft>
+              <a:buFont typeface="Arial" panose="020B0604020202020204" pitchFamily="34" charset="0"/>
+              <a:buChar char="•"/>
+            </a:pPr>
+            <a:r>
+              <a:rPr lang="en-US" sz="1600" b="0" i="0" dirty="0">
+                <a:effectLst/>
+                <a:latin typeface="Arial" panose="020B0604020202020204" pitchFamily="34" charset="0"/>
+                <a:cs typeface="Arial" panose="020B0604020202020204" pitchFamily="34" charset="0"/>
+              </a:rPr>
+              <a:t>Each </a:t>
+            </a:r>
+            <a:r>
+              <a:rPr lang="en-US" sz="1600" b="1" i="0" dirty="0">
+                <a:effectLst/>
+                <a:latin typeface="Arial" panose="020B0604020202020204" pitchFamily="34" charset="0"/>
+                <a:cs typeface="Arial" panose="020B0604020202020204" pitchFamily="34" charset="0"/>
+              </a:rPr>
+              <a:t>row</a:t>
+            </a:r>
+            <a:r>
+              <a:rPr lang="en-US" sz="1600" b="0" i="0" dirty="0">
+                <a:effectLst/>
+                <a:latin typeface="Arial" panose="020B0604020202020204" pitchFamily="34" charset="0"/>
+                <a:cs typeface="Arial" panose="020B0604020202020204" pitchFamily="34" charset="0"/>
+              </a:rPr>
+              <a:t> contains the full cross-track swath as </a:t>
+            </a:r>
+            <a:r>
+              <a:rPr lang="en-US" sz="1600" b="1" i="0" dirty="0">
+                <a:effectLst/>
+                <a:latin typeface="Arial" panose="020B0604020202020204" pitchFamily="34" charset="0"/>
+                <a:cs typeface="Arial" panose="020B0604020202020204" pitchFamily="34" charset="0"/>
+              </a:rPr>
+              <a:t>256 waveform footprints</a:t>
+            </a:r>
+            <a:r>
+              <a:rPr lang="en-US" sz="1600" b="0" i="0" dirty="0">
+                <a:effectLst/>
+                <a:latin typeface="Arial" panose="020B0604020202020204" pitchFamily="34" charset="0"/>
+                <a:cs typeface="Arial" panose="020B0604020202020204" pitchFamily="34" charset="0"/>
+              </a:rPr>
+              <a:t> (parallel tracks).</a:t>
+            </a:r>
+          </a:p>
+          <a:p>
+            <a:pPr marL="742950" lvl="1" indent="-285750" algn="just">
+              <a:spcAft>
+                <a:spcPts val="600"/>
+              </a:spcAft>
+              <a:buFont typeface="Arial" panose="020B0604020202020204" pitchFamily="34" charset="0"/>
+              <a:buChar char="•"/>
+            </a:pPr>
+            <a:r>
+              <a:rPr lang="en-US" sz="1600" b="0" i="0" dirty="0">
+                <a:effectLst/>
+                <a:latin typeface="Arial" panose="020B0604020202020204" pitchFamily="34" charset="0"/>
+                <a:cs typeface="Arial" panose="020B0604020202020204" pitchFamily="34" charset="0"/>
+              </a:rPr>
+              <a:t>Each footprint is a 1D </a:t>
+            </a:r>
+            <a:r>
+              <a:rPr lang="en-US" sz="1600" b="1" i="0" dirty="0">
+                <a:effectLst/>
+                <a:latin typeface="Arial" panose="020B0604020202020204" pitchFamily="34" charset="0"/>
+                <a:cs typeface="Arial" panose="020B0604020202020204" pitchFamily="34" charset="0"/>
+              </a:rPr>
+              <a:t>int16</a:t>
+            </a:r>
+            <a:r>
+              <a:rPr lang="en-US" sz="1600" b="0" i="0" dirty="0">
+                <a:effectLst/>
+                <a:latin typeface="Arial" panose="020B0604020202020204" pitchFamily="34" charset="0"/>
+                <a:cs typeface="Arial" panose="020B0604020202020204" pitchFamily="34" charset="0"/>
+              </a:rPr>
+              <a:t> waveform sampled in time/range.</a:t>
+            </a:r>
+          </a:p>
+          <a:p>
+            <a:pPr algn="just">
+              <a:spcAft>
+                <a:spcPts val="600"/>
+              </a:spcAft>
+            </a:pPr>
+            <a:r>
+              <a:rPr lang="en-US" sz="1600" b="1" i="0" dirty="0">
+                <a:effectLst/>
+                <a:latin typeface="Arial" panose="020B0604020202020204" pitchFamily="34" charset="0"/>
+                <a:cs typeface="Arial" panose="020B0604020202020204" pitchFamily="34" charset="0"/>
+              </a:rPr>
+              <a:t>Key acquisition parameters (from TDMS group properties)</a:t>
+            </a:r>
+            <a:endParaRPr lang="en-US" sz="1600" b="0" i="0" dirty="0">
+              <a:effectLst/>
+              <a:latin typeface="Arial" panose="020B0604020202020204" pitchFamily="34" charset="0"/>
+              <a:cs typeface="Arial" panose="020B0604020202020204" pitchFamily="34" charset="0"/>
+            </a:endParaRPr>
+          </a:p>
+          <a:p>
+            <a:pPr marL="742950" lvl="1" indent="-285750" algn="just">
+              <a:spcAft>
+                <a:spcPts val="600"/>
+              </a:spcAft>
+              <a:buFont typeface="Arial" panose="020B0604020202020204" pitchFamily="34" charset="0"/>
+              <a:buChar char="•"/>
+            </a:pPr>
+            <a:r>
+              <a:rPr lang="en-US" sz="1600" b="0" i="0" dirty="0">
+                <a:effectLst/>
+                <a:latin typeface="Arial" panose="020B0604020202020204" pitchFamily="34" charset="0"/>
+                <a:cs typeface="Arial" panose="020B0604020202020204" pitchFamily="34" charset="0"/>
+              </a:rPr>
+              <a:t># </a:t>
+            </a:r>
+            <a:r>
+              <a:rPr lang="en-US" sz="1600" b="0" i="0" dirty="0" err="1">
+                <a:effectLst/>
+                <a:latin typeface="Arial" panose="020B0604020202020204" pitchFamily="34" charset="0"/>
+                <a:cs typeface="Arial" panose="020B0604020202020204" pitchFamily="34" charset="0"/>
+              </a:rPr>
+              <a:t>WVLSteps</a:t>
+            </a:r>
+            <a:r>
+              <a:rPr lang="en-US" sz="1600" b="0" i="0" dirty="0">
+                <a:effectLst/>
+                <a:latin typeface="Arial" panose="020B0604020202020204" pitchFamily="34" charset="0"/>
+                <a:cs typeface="Arial" panose="020B0604020202020204" pitchFamily="34" charset="0"/>
+              </a:rPr>
+              <a:t>/Sweep = </a:t>
+            </a:r>
+            <a:r>
+              <a:rPr lang="en-US" sz="1600" b="1" i="0" dirty="0">
+                <a:effectLst/>
+                <a:latin typeface="Arial" panose="020B0604020202020204" pitchFamily="34" charset="0"/>
+                <a:cs typeface="Arial" panose="020B0604020202020204" pitchFamily="34" charset="0"/>
+              </a:rPr>
+              <a:t>steps per sweep</a:t>
+            </a:r>
+            <a:r>
+              <a:rPr lang="en-US" sz="1600" b="0" i="0" dirty="0">
+                <a:effectLst/>
+                <a:latin typeface="Arial" panose="020B0604020202020204" pitchFamily="34" charset="0"/>
+                <a:cs typeface="Arial" panose="020B0604020202020204" pitchFamily="34" charset="0"/>
+              </a:rPr>
+              <a:t> (typically 32)</a:t>
+            </a:r>
+          </a:p>
+          <a:p>
+            <a:pPr marL="742950" lvl="1" indent="-285750" algn="just">
+              <a:spcAft>
+                <a:spcPts val="600"/>
+              </a:spcAft>
+              <a:buFont typeface="Arial" panose="020B0604020202020204" pitchFamily="34" charset="0"/>
+              <a:buChar char="•"/>
+            </a:pPr>
+            <a:r>
+              <a:rPr lang="en-US" sz="1600" b="0" i="0" dirty="0">
+                <a:effectLst/>
+                <a:latin typeface="Arial" panose="020B0604020202020204" pitchFamily="34" charset="0"/>
+                <a:cs typeface="Arial" panose="020B0604020202020204" pitchFamily="34" charset="0"/>
+              </a:rPr>
+              <a:t># Sweeps/</a:t>
+            </a:r>
+            <a:r>
+              <a:rPr lang="en-US" sz="1600" b="0" i="0" dirty="0" err="1">
+                <a:effectLst/>
+                <a:latin typeface="Arial" panose="020B0604020202020204" pitchFamily="34" charset="0"/>
+                <a:cs typeface="Arial" panose="020B0604020202020204" pitchFamily="34" charset="0"/>
+              </a:rPr>
+              <a:t>ShiftCycle</a:t>
+            </a:r>
+            <a:r>
+              <a:rPr lang="en-US" sz="1600" b="0" i="0" dirty="0">
+                <a:effectLst/>
+                <a:latin typeface="Arial" panose="020B0604020202020204" pitchFamily="34" charset="0"/>
+                <a:cs typeface="Arial" panose="020B0604020202020204" pitchFamily="34" charset="0"/>
+              </a:rPr>
+              <a:t> = </a:t>
+            </a:r>
+            <a:r>
+              <a:rPr lang="en-US" sz="1600" b="1" i="0" dirty="0">
+                <a:effectLst/>
+                <a:latin typeface="Arial" panose="020B0604020202020204" pitchFamily="34" charset="0"/>
+                <a:cs typeface="Arial" panose="020B0604020202020204" pitchFamily="34" charset="0"/>
+              </a:rPr>
+              <a:t>sweeps per cycle</a:t>
+            </a:r>
+            <a:r>
+              <a:rPr lang="en-US" sz="1600" b="0" i="0" dirty="0">
+                <a:effectLst/>
+                <a:latin typeface="Arial" panose="020B0604020202020204" pitchFamily="34" charset="0"/>
+                <a:cs typeface="Arial" panose="020B0604020202020204" pitchFamily="34" charset="0"/>
+              </a:rPr>
+              <a:t> (typically 8)</a:t>
+            </a:r>
+          </a:p>
+          <a:p>
+            <a:pPr marL="742950" lvl="1" indent="-285750" algn="just">
+              <a:spcAft>
+                <a:spcPts val="600"/>
+              </a:spcAft>
+              <a:buFont typeface="Arial" panose="020B0604020202020204" pitchFamily="34" charset="0"/>
+              <a:buChar char="•"/>
+            </a:pPr>
+            <a:r>
+              <a:rPr lang="en-US" sz="1600" b="0" i="0" dirty="0">
+                <a:effectLst/>
+                <a:latin typeface="Arial" panose="020B0604020202020204" pitchFamily="34" charset="0"/>
+                <a:cs typeface="Arial" panose="020B0604020202020204" pitchFamily="34" charset="0"/>
+              </a:rPr>
+              <a:t>Sweeps/File = </a:t>
+            </a:r>
+            <a:r>
+              <a:rPr lang="en-US" sz="1600" b="1" i="0" dirty="0">
+                <a:effectLst/>
+                <a:latin typeface="Arial" panose="020B0604020202020204" pitchFamily="34" charset="0"/>
+                <a:cs typeface="Arial" panose="020B0604020202020204" pitchFamily="34" charset="0"/>
+              </a:rPr>
+              <a:t>rows per file</a:t>
+            </a:r>
+            <a:r>
+              <a:rPr lang="en-US" sz="1600" b="0" i="0" dirty="0">
+                <a:effectLst/>
+                <a:latin typeface="Arial" panose="020B0604020202020204" pitchFamily="34" charset="0"/>
+                <a:cs typeface="Arial" panose="020B0604020202020204" pitchFamily="34" charset="0"/>
+              </a:rPr>
+              <a:t> (number of </a:t>
+            </a:r>
+            <a:r>
+              <a:rPr lang="en-US" sz="1600" b="0" i="0" dirty="0" err="1">
+                <a:effectLst/>
+                <a:latin typeface="Arial" panose="020B0604020202020204" pitchFamily="34" charset="0"/>
+                <a:cs typeface="Arial" panose="020B0604020202020204" pitchFamily="34" charset="0"/>
+              </a:rPr>
+              <a:t>pushbroom</a:t>
+            </a:r>
+            <a:r>
+              <a:rPr lang="en-US" sz="1600" b="0" i="0" dirty="0">
+                <a:effectLst/>
+                <a:latin typeface="Arial" panose="020B0604020202020204" pitchFamily="34" charset="0"/>
+                <a:cs typeface="Arial" panose="020B0604020202020204" pitchFamily="34" charset="0"/>
+              </a:rPr>
+              <a:t> advances)</a:t>
+            </a:r>
+          </a:p>
+          <a:p>
+            <a:pPr marL="742950" lvl="1" indent="-285750" algn="just">
+              <a:spcAft>
+                <a:spcPts val="600"/>
+              </a:spcAft>
+              <a:buFont typeface="Arial" panose="020B0604020202020204" pitchFamily="34" charset="0"/>
+              <a:buChar char="•"/>
+            </a:pPr>
+            <a:r>
+              <a:rPr lang="en-US" sz="1600" b="0" i="0" dirty="0">
+                <a:effectLst/>
+                <a:latin typeface="Arial" panose="020B0604020202020204" pitchFamily="34" charset="0"/>
+                <a:cs typeface="Arial" panose="020B0604020202020204" pitchFamily="34" charset="0"/>
+              </a:rPr>
+              <a:t>Derived: </a:t>
+            </a:r>
+            <a:r>
+              <a:rPr lang="en-US" sz="1600" b="0" i="0" dirty="0" err="1">
+                <a:effectLst/>
+                <a:latin typeface="Arial" panose="020B0604020202020204" pitchFamily="34" charset="0"/>
+                <a:cs typeface="Arial" panose="020B0604020202020204" pitchFamily="34" charset="0"/>
+              </a:rPr>
+              <a:t>footprints_per_row</a:t>
+            </a:r>
+            <a:r>
+              <a:rPr lang="en-US" sz="1600" b="0" i="0" dirty="0">
+                <a:effectLst/>
+                <a:latin typeface="Arial" panose="020B0604020202020204" pitchFamily="34" charset="0"/>
+                <a:cs typeface="Arial" panose="020B0604020202020204" pitchFamily="34" charset="0"/>
+              </a:rPr>
+              <a:t> = </a:t>
+            </a:r>
+            <a:r>
+              <a:rPr lang="en-US" sz="1600" b="0" i="0" dirty="0" err="1">
+                <a:effectLst/>
+                <a:latin typeface="Arial" panose="020B0604020202020204" pitchFamily="34" charset="0"/>
+                <a:cs typeface="Arial" panose="020B0604020202020204" pitchFamily="34" charset="0"/>
+              </a:rPr>
+              <a:t>steps_per_sweep</a:t>
+            </a:r>
+            <a:r>
+              <a:rPr lang="en-US" sz="1600" b="0" i="0" dirty="0">
+                <a:effectLst/>
+                <a:latin typeface="Arial" panose="020B0604020202020204" pitchFamily="34" charset="0"/>
+                <a:cs typeface="Arial" panose="020B0604020202020204" pitchFamily="34" charset="0"/>
+              </a:rPr>
+              <a:t> × </a:t>
+            </a:r>
+            <a:r>
+              <a:rPr lang="en-US" sz="1600" b="0" i="0" dirty="0" err="1">
+                <a:effectLst/>
+                <a:latin typeface="Arial" panose="020B0604020202020204" pitchFamily="34" charset="0"/>
+                <a:cs typeface="Arial" panose="020B0604020202020204" pitchFamily="34" charset="0"/>
+              </a:rPr>
+              <a:t>sweeps_per_cycle</a:t>
+            </a:r>
+            <a:r>
+              <a:rPr lang="en-US" sz="1600" b="0" i="0" dirty="0">
+                <a:effectLst/>
+                <a:latin typeface="Arial" panose="020B0604020202020204" pitchFamily="34" charset="0"/>
+                <a:cs typeface="Arial" panose="020B0604020202020204" pitchFamily="34" charset="0"/>
+              </a:rPr>
+              <a:t> = 32 × 8 = 256</a:t>
+            </a:r>
+          </a:p>
+          <a:p>
+            <a:pPr algn="just">
+              <a:spcAft>
+                <a:spcPts val="600"/>
+              </a:spcAft>
+            </a:pPr>
+            <a:r>
+              <a:rPr lang="en-US" sz="1600" b="1" i="0" dirty="0">
+                <a:effectLst/>
+                <a:latin typeface="Arial" panose="020B0604020202020204" pitchFamily="34" charset="0"/>
+                <a:cs typeface="Arial" panose="020B0604020202020204" pitchFamily="34" charset="0"/>
+              </a:rPr>
+              <a:t>Sweep vs Step (the critical definitions)</a:t>
+            </a:r>
+            <a:endParaRPr lang="en-US" sz="1600" b="0" i="0" dirty="0">
+              <a:effectLst/>
+              <a:latin typeface="Arial" panose="020B0604020202020204" pitchFamily="34" charset="0"/>
+              <a:cs typeface="Arial" panose="020B0604020202020204" pitchFamily="34" charset="0"/>
+            </a:endParaRPr>
+          </a:p>
+          <a:p>
+            <a:pPr marL="742950" lvl="1" indent="-285750" algn="just">
+              <a:spcAft>
+                <a:spcPts val="600"/>
+              </a:spcAft>
+              <a:buFont typeface="Arial" panose="020B0604020202020204" pitchFamily="34" charset="0"/>
+              <a:buChar char="•"/>
+            </a:pPr>
+            <a:r>
+              <a:rPr lang="en-US" sz="1600" b="1" i="0" dirty="0">
+                <a:effectLst/>
+                <a:latin typeface="Arial" panose="020B0604020202020204" pitchFamily="34" charset="0"/>
+                <a:cs typeface="Arial" panose="020B0604020202020204" pitchFamily="34" charset="0"/>
+              </a:rPr>
+              <a:t>Step (k)</a:t>
+            </a:r>
+            <a:r>
+              <a:rPr lang="en-US" sz="1600" b="0" i="0" dirty="0">
+                <a:effectLst/>
+                <a:latin typeface="Arial" panose="020B0604020202020204" pitchFamily="34" charset="0"/>
+                <a:cs typeface="Arial" panose="020B0604020202020204" pitchFamily="34" charset="0"/>
+              </a:rPr>
+              <a:t>: one discrete cross-track pointing/position within a wavelength-tuning sweep (k = 0..31).</a:t>
+            </a:r>
+          </a:p>
+          <a:p>
+            <a:pPr marL="742950" lvl="1" indent="-285750" algn="just">
+              <a:spcAft>
+                <a:spcPts val="600"/>
+              </a:spcAft>
+              <a:buFont typeface="Arial" panose="020B0604020202020204" pitchFamily="34" charset="0"/>
+              <a:buChar char="•"/>
+            </a:pPr>
+            <a:r>
+              <a:rPr lang="en-US" sz="1600" b="1" i="0" dirty="0">
+                <a:effectLst/>
+                <a:latin typeface="Arial" panose="020B0604020202020204" pitchFamily="34" charset="0"/>
+                <a:cs typeface="Arial" panose="020B0604020202020204" pitchFamily="34" charset="0"/>
+              </a:rPr>
+              <a:t>Sweep (j)</a:t>
+            </a:r>
+            <a:r>
+              <a:rPr lang="en-US" sz="1600" b="0" i="0" dirty="0">
+                <a:effectLst/>
+                <a:latin typeface="Arial" panose="020B0604020202020204" pitchFamily="34" charset="0"/>
+                <a:cs typeface="Arial" panose="020B0604020202020204" pitchFamily="34" charset="0"/>
+              </a:rPr>
+              <a:t>: one pass through all steps (j = 0..7 within a shift cycle).</a:t>
+            </a:r>
+          </a:p>
+          <a:p>
+            <a:pPr marL="742950" lvl="1" indent="-285750" algn="just">
+              <a:spcAft>
+                <a:spcPts val="600"/>
+              </a:spcAft>
+              <a:buFont typeface="Arial" panose="020B0604020202020204" pitchFamily="34" charset="0"/>
+              <a:buChar char="•"/>
+            </a:pPr>
+            <a:r>
+              <a:rPr lang="en-US" sz="1600" b="1" i="0" dirty="0">
+                <a:effectLst/>
+                <a:latin typeface="Arial" panose="020B0604020202020204" pitchFamily="34" charset="0"/>
+                <a:cs typeface="Arial" panose="020B0604020202020204" pitchFamily="34" charset="0"/>
+              </a:rPr>
+              <a:t>Why 8 sweeps?</a:t>
+            </a:r>
+            <a:r>
+              <a:rPr lang="en-US" sz="1600" b="0" i="0" dirty="0">
+                <a:effectLst/>
+                <a:latin typeface="Arial" panose="020B0604020202020204" pitchFamily="34" charset="0"/>
+                <a:cs typeface="Arial" panose="020B0604020202020204" pitchFamily="34" charset="0"/>
+              </a:rPr>
+              <a:t> Interleaving/fill-in across sweeps densifies cross-track sampling so one row becomes 256 footprints.</a:t>
+            </a:r>
+          </a:p>
+          <a:p>
+            <a:pPr algn="just">
+              <a:spcAft>
+                <a:spcPts val="600"/>
+              </a:spcAft>
+            </a:pPr>
+            <a:r>
+              <a:rPr lang="en-US" sz="1600" b="1" i="0" dirty="0">
+                <a:effectLst/>
+                <a:latin typeface="Arial" panose="020B0604020202020204" pitchFamily="34" charset="0"/>
+                <a:cs typeface="Arial" panose="020B0604020202020204" pitchFamily="34" charset="0"/>
+              </a:rPr>
+              <a:t>Channel naming and meaning (how data is stored)</a:t>
+            </a:r>
+            <a:endParaRPr lang="en-US" sz="1600" b="0" i="0" dirty="0">
+              <a:effectLst/>
+              <a:latin typeface="Arial" panose="020B0604020202020204" pitchFamily="34" charset="0"/>
+              <a:cs typeface="Arial" panose="020B0604020202020204" pitchFamily="34" charset="0"/>
+            </a:endParaRPr>
+          </a:p>
+          <a:p>
+            <a:pPr marL="742950" lvl="1" indent="-285750" algn="just">
+              <a:spcAft>
+                <a:spcPts val="600"/>
+              </a:spcAft>
+              <a:buFont typeface="Arial" panose="020B0604020202020204" pitchFamily="34" charset="0"/>
+              <a:buChar char="•"/>
+            </a:pPr>
+            <a:r>
+              <a:rPr lang="en-US" sz="1600" b="0" i="0" dirty="0">
+                <a:effectLst/>
+                <a:latin typeface="Arial" panose="020B0604020202020204" pitchFamily="34" charset="0"/>
+                <a:cs typeface="Arial" panose="020B0604020202020204" pitchFamily="34" charset="0"/>
+              </a:rPr>
+              <a:t>TDMS contains </a:t>
+            </a:r>
+            <a:r>
+              <a:rPr lang="en-US" sz="1600" b="1" i="0" dirty="0">
+                <a:effectLst/>
+                <a:latin typeface="Arial" panose="020B0604020202020204" pitchFamily="34" charset="0"/>
+                <a:cs typeface="Arial" panose="020B0604020202020204" pitchFamily="34" charset="0"/>
+              </a:rPr>
+              <a:t>256 channels</a:t>
+            </a:r>
+            <a:r>
+              <a:rPr lang="en-US" sz="1600" b="0" i="0" dirty="0">
+                <a:effectLst/>
+                <a:latin typeface="Arial" panose="020B0604020202020204" pitchFamily="34" charset="0"/>
+                <a:cs typeface="Arial" panose="020B0604020202020204" pitchFamily="34" charset="0"/>
+              </a:rPr>
+              <a:t> named Sweep{j}Step{k} for all (</a:t>
+            </a:r>
+            <a:r>
+              <a:rPr lang="en-US" sz="1600" b="0" i="0" dirty="0" err="1">
+                <a:effectLst/>
+                <a:latin typeface="Arial" panose="020B0604020202020204" pitchFamily="34" charset="0"/>
+                <a:cs typeface="Arial" panose="020B0604020202020204" pitchFamily="34" charset="0"/>
+              </a:rPr>
+              <a:t>j,k</a:t>
+            </a:r>
+            <a:r>
+              <a:rPr lang="en-US" sz="1600" b="0" i="0" dirty="0">
+                <a:effectLst/>
+                <a:latin typeface="Arial" panose="020B0604020202020204" pitchFamily="34" charset="0"/>
+                <a:cs typeface="Arial" panose="020B0604020202020204" pitchFamily="34" charset="0"/>
+              </a:rPr>
+              <a:t>) pairs.</a:t>
+            </a:r>
+          </a:p>
+          <a:p>
+            <a:pPr marL="742950" lvl="1" indent="-285750" algn="just">
+              <a:spcAft>
+                <a:spcPts val="600"/>
+              </a:spcAft>
+              <a:buFont typeface="Arial" panose="020B0604020202020204" pitchFamily="34" charset="0"/>
+              <a:buChar char="•"/>
+            </a:pPr>
+            <a:r>
+              <a:rPr lang="en-US" sz="1600" b="0" i="0" dirty="0">
+                <a:effectLst/>
+                <a:latin typeface="Arial" panose="020B0604020202020204" pitchFamily="34" charset="0"/>
+                <a:cs typeface="Arial" panose="020B0604020202020204" pitchFamily="34" charset="0"/>
+              </a:rPr>
+              <a:t>Each channel corresponds to a </a:t>
+            </a:r>
+            <a:r>
+              <a:rPr lang="en-US" sz="1600" b="1" i="0" dirty="0">
+                <a:effectLst/>
+                <a:latin typeface="Arial" panose="020B0604020202020204" pitchFamily="34" charset="0"/>
+                <a:cs typeface="Arial" panose="020B0604020202020204" pitchFamily="34" charset="0"/>
+              </a:rPr>
+              <a:t>fixed footprint index</a:t>
+            </a:r>
+            <a:r>
+              <a:rPr lang="en-US" sz="1600" b="0" i="0" dirty="0">
+                <a:effectLst/>
+                <a:latin typeface="Arial" panose="020B0604020202020204" pitchFamily="34" charset="0"/>
+                <a:cs typeface="Arial" panose="020B0604020202020204" pitchFamily="34" charset="0"/>
+              </a:rPr>
+              <a:t> across the entire file (same cross-track position pattern).</a:t>
+            </a:r>
+          </a:p>
+          <a:p>
+            <a:pPr marL="742950" lvl="1" indent="-285750" algn="just">
+              <a:spcAft>
+                <a:spcPts val="600"/>
+              </a:spcAft>
+              <a:buFont typeface="Arial" panose="020B0604020202020204" pitchFamily="34" charset="0"/>
+              <a:buChar char="•"/>
+            </a:pPr>
+            <a:r>
+              <a:rPr lang="en-US" sz="1600" b="0" i="0" dirty="0">
+                <a:effectLst/>
+                <a:latin typeface="Arial" panose="020B0604020202020204" pitchFamily="34" charset="0"/>
+                <a:cs typeface="Arial" panose="020B0604020202020204" pitchFamily="34" charset="0"/>
+              </a:rPr>
+              <a:t>Each channel is stored as one long 1D stream made by concatenating all rows:</a:t>
+            </a:r>
+          </a:p>
+          <a:p>
+            <a:pPr lvl="2" algn="just">
+              <a:spcAft>
+                <a:spcPts val="600"/>
+              </a:spcAft>
+            </a:pPr>
+            <a:r>
+              <a:rPr lang="en-US" sz="1600" b="0" i="0" dirty="0">
+                <a:effectLst/>
+                <a:latin typeface="Arial" panose="020B0604020202020204" pitchFamily="34" charset="0"/>
+                <a:cs typeface="Arial" panose="020B0604020202020204" pitchFamily="34" charset="0"/>
+              </a:rPr>
+              <a:t>channel = [row0 waveform][row1 waveform] ... [rowN-1 waveform]</a:t>
+            </a:r>
           </a:p>
         </p:txBody>
       </p:sp>
@@ -5781,6 +6473,128 @@
     <p:extLst>
       <p:ext uri="{BB962C8B-B14F-4D97-AF65-F5344CB8AC3E}">
         <p14:creationId xmlns:p14="http://schemas.microsoft.com/office/powerpoint/2010/main" val="3981881105"/>
+      </p:ext>
+    </p:extLst>
+  </p:cSld>
+  <p:clrMapOvr>
+    <a:masterClrMapping/>
+  </p:clrMapOvr>
+</p:sld>
+</file>
+
+<file path=ppt/slides/slide9.xml><?xml version="1.0" encoding="utf-8"?>
+<p:sld xmlns:a="http://schemas.openxmlformats.org/drawingml/2006/main" xmlns:r="http://schemas.openxmlformats.org/officeDocument/2006/relationships" xmlns:p="http://schemas.openxmlformats.org/presentationml/2006/main">
+  <p:cSld>
+    <p:spTree>
+      <p:nvGrpSpPr>
+        <p:cNvPr id="1" name="">
+          <a:extLst>
+            <a:ext uri="{FF2B5EF4-FFF2-40B4-BE49-F238E27FC236}">
+              <a16:creationId xmlns:a16="http://schemas.microsoft.com/office/drawing/2014/main" id="{8AB51A1C-89B0-A2D4-5167-8B6CC5FC45DB}"/>
+            </a:ext>
+          </a:extLst>
+        </p:cNvPr>
+        <p:cNvGrpSpPr/>
+        <p:nvPr/>
+      </p:nvGrpSpPr>
+      <p:grpSpPr>
+        <a:xfrm>
+          <a:off x="0" y="0"/>
+          <a:ext cx="0" cy="0"/>
+          <a:chOff x="0" y="0"/>
+          <a:chExt cx="0" cy="0"/>
+        </a:xfrm>
+      </p:grpSpPr>
+      <p:sp>
+        <p:nvSpPr>
+          <p:cNvPr id="2" name="TextBox 1">
+            <a:extLst>
+              <a:ext uri="{FF2B5EF4-FFF2-40B4-BE49-F238E27FC236}">
+                <a16:creationId xmlns:a16="http://schemas.microsoft.com/office/drawing/2014/main" id="{77B96F6B-AE07-2785-FD53-FE94AD45BA47}"/>
+              </a:ext>
+            </a:extLst>
+          </p:cNvPr>
+          <p:cNvSpPr txBox="1"/>
+          <p:nvPr/>
+        </p:nvSpPr>
+        <p:spPr>
+          <a:xfrm>
+            <a:off x="227066" y="141706"/>
+            <a:ext cx="6575454" cy="461665"/>
+          </a:xfrm>
+          <a:prstGeom prst="rect">
+            <a:avLst/>
+          </a:prstGeom>
+          <a:noFill/>
+        </p:spPr>
+        <p:txBody>
+          <a:bodyPr wrap="none" rtlCol="0">
+            <a:spAutoFit/>
+          </a:bodyPr>
+          <a:lstStyle/>
+          <a:p>
+            <a:pPr marL="342900" indent="-342900">
+              <a:buFont typeface="Wingdings" panose="05000000000000000000" pitchFamily="2" charset="2"/>
+              <a:buChar char="Ø"/>
+            </a:pPr>
+            <a:r>
+              <a:rPr lang="en-US" altLang="zh-CN" sz="2400" b="1" dirty="0">
+                <a:latin typeface="Arial" panose="020B0604020202020204" pitchFamily="34" charset="0"/>
+                <a:cs typeface="Arial" panose="020B0604020202020204" pitchFamily="34" charset="0"/>
+              </a:rPr>
+              <a:t>Airborne / UAV observation mode - TDMS</a:t>
+            </a:r>
+            <a:endParaRPr lang="en-US" sz="2400" b="1" dirty="0">
+              <a:latin typeface="Arial" panose="020B0604020202020204" pitchFamily="34" charset="0"/>
+              <a:cs typeface="Arial" panose="020B0604020202020204" pitchFamily="34" charset="0"/>
+            </a:endParaRPr>
+          </a:p>
+        </p:txBody>
+      </p:sp>
+      <p:pic>
+        <p:nvPicPr>
+          <p:cNvPr id="5" name="Picture 4">
+            <a:extLst>
+              <a:ext uri="{FF2B5EF4-FFF2-40B4-BE49-F238E27FC236}">
+                <a16:creationId xmlns:a16="http://schemas.microsoft.com/office/drawing/2014/main" id="{57B2DAE5-1984-7E7B-4C37-5A30B1A2ED92}"/>
+              </a:ext>
+            </a:extLst>
+          </p:cNvPr>
+          <p:cNvPicPr>
+            <a:picLocks noChangeAspect="1"/>
+          </p:cNvPicPr>
+          <p:nvPr/>
+        </p:nvPicPr>
+        <p:blipFill>
+          <a:blip r:embed="rId2"/>
+          <a:stretch>
+            <a:fillRect/>
+          </a:stretch>
+        </p:blipFill>
+        <p:spPr>
+          <a:xfrm>
+            <a:off x="966193" y="641580"/>
+            <a:ext cx="10259613" cy="5855158"/>
+          </a:xfrm>
+          <a:prstGeom prst="rect">
+            <a:avLst/>
+          </a:prstGeom>
+          <a:ln>
+            <a:noFill/>
+          </a:ln>
+          <a:effectLst>
+            <a:outerShdw blurRad="190500" algn="tl" rotWithShape="0">
+              <a:srgbClr val="000000">
+                <a:alpha val="70000"/>
+              </a:srgbClr>
+            </a:outerShdw>
+          </a:effectLst>
+        </p:spPr>
+      </p:pic>
+    </p:spTree>
+    <p:extLst>
+      <p:ext uri="{BB962C8B-B14F-4D97-AF65-F5344CB8AC3E}">
+        <p14:creationId xmlns:p14="http://schemas.microsoft.com/office/powerpoint/2010/main" val="3653343407"/>
       </p:ext>
     </p:extLst>
   </p:cSld>
